--- a/bloque1_bigdata/csbc26_b1_bigdata.pptx
+++ b/bloque1_bigdata/csbc26_b1_bigdata.pptx
@@ -6,18 +6,18 @@
   </p:sldMasterIdLst>
   <p:sldIdLst>
     <p:sldId id="256" r:id="rId7"/>
-    <p:sldId id="257" r:id="rId8"/>
-    <p:sldId id="258" r:id="rId9"/>
-    <p:sldId id="259" r:id="rId10"/>
-    <p:sldId id="260" r:id="rId11"/>
-    <p:sldId id="261" r:id="rId12"/>
-    <p:sldId id="262" r:id="rId13"/>
-    <p:sldId id="263" r:id="rId14"/>
-    <p:sldId id="264" r:id="rId15"/>
-    <p:sldId id="265" r:id="rId16"/>
-    <p:sldId id="266" r:id="rId17"/>
-    <p:sldId id="267" r:id="rId18"/>
-    <p:sldId id="268" r:id="rId19"/>
+    <p:sldId id="257" r:id="rId9"/>
+    <p:sldId id="258" r:id="rId10"/>
+    <p:sldId id="259" r:id="rId11"/>
+    <p:sldId id="260" r:id="rId12"/>
+    <p:sldId id="261" r:id="rId13"/>
+    <p:sldId id="262" r:id="rId14"/>
+    <p:sldId id="263" r:id="rId15"/>
+    <p:sldId id="264" r:id="rId16"/>
+    <p:sldId id="265" r:id="rId17"/>
+    <p:sldId id="266" r:id="rId18"/>
+    <p:sldId id="267" r:id="rId19"/>
+    <p:sldId id="268" r:id="rId20"/>
   </p:sldIdLst>
   <p:sldSz cx="12188952" cy="6858000" type="screen4x3"/>
   <p:notesSz cx="6858000" cy="9144000"/>
@@ -117,6 +117,1266 @@
     </a:lvl9pPr>
   </p:defaultTextStyle>
 </p:presentation>
+</file>
+
+<file path=ppt/notesMasters/notesMaster1.xml><?xml version="1.0" encoding="utf-8"?>
+<p:notesMaster xmlns:a="http://schemas.openxmlformats.org/drawingml/2006/main" xmlns:p="http://schemas.openxmlformats.org/presentationml/2006/main" xmlns:r="http://schemas.openxmlformats.org/officeDocument/2006/relationships">
+  <p:cSld>
+    <p:bg>
+      <p:bgRef idx="1001">
+        <a:schemeClr val="bg1"/>
+      </p:bgRef>
+    </p:bg>
+    <p:spTree>
+      <p:nvGrpSpPr>
+        <p:cNvPr id="1" name=""/>
+        <p:cNvGrpSpPr/>
+        <p:nvPr/>
+      </p:nvGrpSpPr>
+      <p:grpSpPr>
+        <a:xfrm>
+          <a:off x="0" y="0"/>
+          <a:ext cx="0" cy="0"/>
+          <a:chOff x="0" y="0"/>
+          <a:chExt cx="0" cy="0"/>
+        </a:xfrm>
+      </p:grpSpPr>
+      <p:sp>
+        <p:nvSpPr>
+          <p:cNvPr id="2" name="Header Placeholder 1"/>
+          <p:cNvSpPr>
+            <a:spLocks noGrp="1"/>
+          </p:cNvSpPr>
+          <p:nvPr>
+            <p:ph type="hdr" sz="quarter"/>
+          </p:nvPr>
+        </p:nvSpPr>
+        <p:spPr>
+          <a:xfrm>
+            <a:off x="0" y="0"/>
+            <a:ext cx="2971800" cy="457200"/>
+          </a:xfrm>
+          <a:prstGeom prst="rect">
+            <a:avLst/>
+          </a:prstGeom>
+        </p:spPr>
+        <p:txBody>
+          <a:bodyPr vert="horz" lIns="91440" tIns="45720" rIns="91440" bIns="45720" rtlCol="0"/>
+          <a:lstStyle>
+            <a:lvl1pPr algn="l">
+              <a:defRPr sz="1200"/>
+            </a:lvl1pPr>
+          </a:lstStyle>
+          <a:p>
+            <a:endParaRPr lang="en-US"/>
+          </a:p>
+        </p:txBody>
+      </p:sp>
+      <p:sp>
+        <p:nvSpPr>
+          <p:cNvPr id="3" name="Date Placeholder 2"/>
+          <p:cNvSpPr>
+            <a:spLocks noGrp="1"/>
+          </p:cNvSpPr>
+          <p:nvPr>
+            <p:ph type="dt" idx="1"/>
+          </p:nvPr>
+        </p:nvSpPr>
+        <p:spPr>
+          <a:xfrm>
+            <a:off x="3884613" y="0"/>
+            <a:ext cx="2971800" cy="457200"/>
+          </a:xfrm>
+          <a:prstGeom prst="rect">
+            <a:avLst/>
+          </a:prstGeom>
+        </p:spPr>
+        <p:txBody>
+          <a:bodyPr vert="horz" lIns="91440" tIns="45720" rIns="91440" bIns="45720" rtlCol="0"/>
+          <a:lstStyle>
+            <a:lvl1pPr algn="r">
+              <a:defRPr sz="1200"/>
+            </a:lvl1pPr>
+          </a:lstStyle>
+          <a:p>
+            <a:fld id="{0F89C1C7-3DCD-1040-A9CF-14679D8B5DDD}" type="datetimeFigureOut">
+              <a:rPr lang="en-US" smtClean="0"/>
+              <a:t>10/17/16</a:t>
+            </a:fld>
+            <a:endParaRPr lang="en-US"/>
+          </a:p>
+        </p:txBody>
+      </p:sp>
+      <p:sp>
+        <p:nvSpPr>
+          <p:cNvPr id="4" name="Slide Image Placeholder 3"/>
+          <p:cNvSpPr>
+            <a:spLocks noGrp="1" noRot="1" noChangeAspect="1"/>
+          </p:cNvSpPr>
+          <p:nvPr>
+            <p:ph type="sldImg" idx="2"/>
+          </p:nvPr>
+        </p:nvSpPr>
+        <p:spPr>
+          <a:xfrm>
+            <a:off x="1143000" y="685800"/>
+            <a:ext cx="4572000" cy="3429000"/>
+          </a:xfrm>
+          <a:prstGeom prst="rect">
+            <a:avLst/>
+          </a:prstGeom>
+          <a:noFill/>
+          <a:ln w="12700">
+            <a:solidFill>
+              <a:prstClr val="black"/>
+            </a:solidFill>
+          </a:ln>
+        </p:spPr>
+        <p:txBody>
+          <a:bodyPr vert="horz" lIns="91440" tIns="45720" rIns="91440" bIns="45720" rtlCol="0" anchor="ctr"/>
+          <a:lstStyle/>
+          <a:p>
+            <a:endParaRPr lang="en-US"/>
+          </a:p>
+        </p:txBody>
+      </p:sp>
+      <p:sp>
+        <p:nvSpPr>
+          <p:cNvPr id="5" name="Notes Placeholder 4"/>
+          <p:cNvSpPr>
+            <a:spLocks noGrp="1"/>
+          </p:cNvSpPr>
+          <p:nvPr>
+            <p:ph type="body" sz="quarter" idx="3"/>
+          </p:nvPr>
+        </p:nvSpPr>
+        <p:spPr>
+          <a:xfrm>
+            <a:off x="685800" y="4343400"/>
+            <a:ext cx="5486400" cy="4114800"/>
+          </a:xfrm>
+          <a:prstGeom prst="rect">
+            <a:avLst/>
+          </a:prstGeom>
+        </p:spPr>
+        <p:txBody>
+          <a:bodyPr vert="horz" lIns="91440" tIns="45720" rIns="91440" bIns="45720" rtlCol="0"/>
+          <a:lstStyle/>
+          <a:p>
+            <a:pPr lvl="0"/>
+            <a:r>
+              <a:rPr lang="en-US" smtClean="0"/>
+              <a:t>Click to edit Master text styles</a:t>
+            </a:r>
+          </a:p>
+          <a:p>
+            <a:pPr lvl="1"/>
+            <a:r>
+              <a:rPr lang="en-US" smtClean="0"/>
+              <a:t>Second level</a:t>
+            </a:r>
+          </a:p>
+          <a:p>
+            <a:pPr lvl="2"/>
+            <a:r>
+              <a:rPr lang="en-US" smtClean="0"/>
+              <a:t>Third level</a:t>
+            </a:r>
+          </a:p>
+          <a:p>
+            <a:pPr lvl="3"/>
+            <a:r>
+              <a:rPr lang="en-US" smtClean="0"/>
+              <a:t>Fourth level</a:t>
+            </a:r>
+          </a:p>
+          <a:p>
+            <a:pPr lvl="4"/>
+            <a:r>
+              <a:rPr lang="en-US" smtClean="0"/>
+              <a:t>Fifth level</a:t>
+            </a:r>
+            <a:endParaRPr lang="en-US"/>
+          </a:p>
+        </p:txBody>
+      </p:sp>
+      <p:sp>
+        <p:nvSpPr>
+          <p:cNvPr id="6" name="Footer Placeholder 5"/>
+          <p:cNvSpPr>
+            <a:spLocks noGrp="1"/>
+          </p:cNvSpPr>
+          <p:nvPr>
+            <p:ph type="ftr" sz="quarter" idx="4"/>
+          </p:nvPr>
+        </p:nvSpPr>
+        <p:spPr>
+          <a:xfrm>
+            <a:off x="0" y="8685213"/>
+            <a:ext cx="2971800" cy="457200"/>
+          </a:xfrm>
+          <a:prstGeom prst="rect">
+            <a:avLst/>
+          </a:prstGeom>
+        </p:spPr>
+        <p:txBody>
+          <a:bodyPr vert="horz" lIns="91440" tIns="45720" rIns="91440" bIns="45720" rtlCol="0" anchor="b"/>
+          <a:lstStyle>
+            <a:lvl1pPr algn="l">
+              <a:defRPr sz="1200"/>
+            </a:lvl1pPr>
+          </a:lstStyle>
+          <a:p>
+            <a:endParaRPr lang="en-US"/>
+          </a:p>
+        </p:txBody>
+      </p:sp>
+      <p:sp>
+        <p:nvSpPr>
+          <p:cNvPr id="7" name="Slide Number Placeholder 6"/>
+          <p:cNvSpPr>
+            <a:spLocks noGrp="1"/>
+          </p:cNvSpPr>
+          <p:nvPr>
+            <p:ph type="sldNum" sz="quarter" idx="5"/>
+          </p:nvPr>
+        </p:nvSpPr>
+        <p:spPr>
+          <a:xfrm>
+            <a:off x="3884613" y="8685213"/>
+            <a:ext cx="2971800" cy="457200"/>
+          </a:xfrm>
+          <a:prstGeom prst="rect">
+            <a:avLst/>
+          </a:prstGeom>
+        </p:spPr>
+        <p:txBody>
+          <a:bodyPr vert="horz" lIns="91440" tIns="45720" rIns="91440" bIns="45720" rtlCol="0" anchor="b"/>
+          <a:lstStyle>
+            <a:lvl1pPr algn="r">
+              <a:defRPr sz="1200"/>
+            </a:lvl1pPr>
+          </a:lstStyle>
+          <a:p>
+            <a:fld id="{BB5E49A5-4136-284D-997B-48E1D791AD67}" type="slidenum">
+              <a:rPr lang="en-US" smtClean="0"/>
+              <a:t>‹#›</a:t>
+            </a:fld>
+            <a:endParaRPr lang="en-US"/>
+          </a:p>
+        </p:txBody>
+      </p:sp>
+    </p:spTree>
+    <p:extLst>
+      <p:ext uri="{BB962C8B-B14F-4D97-AF65-F5344CB8AC3E}">
+        <p14:creationId xmlns:p14="http://schemas.microsoft.com/office/powerpoint/2010/main" val="2623252185"/>
+      </p:ext>
+    </p:extLst>
+  </p:cSld>
+  <p:clrMap bg1="lt1" tx1="dk1" bg2="lt2" tx2="dk2" accent1="accent1" accent2="accent2" accent3="accent3" accent4="accent4" accent5="accent5" accent6="accent6" hlink="hlink" folHlink="folHlink"/>
+  <p:notesStyle>
+    <a:lvl1pPr marL="0" algn="l" defTabSz="457200" rtl="0" eaLnBrk="1" latinLnBrk="0" hangingPunct="1">
+      <a:defRPr sz="1200" kern="1200">
+        <a:solidFill>
+          <a:schemeClr val="tx1"/>
+        </a:solidFill>
+        <a:latin typeface="+mn-lt"/>
+        <a:ea typeface="+mn-ea"/>
+        <a:cs typeface="+mn-cs"/>
+      </a:defRPr>
+    </a:lvl1pPr>
+    <a:lvl2pPr marL="457200" algn="l" defTabSz="457200" rtl="0" eaLnBrk="1" latinLnBrk="0" hangingPunct="1">
+      <a:defRPr sz="1200" kern="1200">
+        <a:solidFill>
+          <a:schemeClr val="tx1"/>
+        </a:solidFill>
+        <a:latin typeface="+mn-lt"/>
+        <a:ea typeface="+mn-ea"/>
+        <a:cs typeface="+mn-cs"/>
+      </a:defRPr>
+    </a:lvl2pPr>
+    <a:lvl3pPr marL="914400" algn="l" defTabSz="457200" rtl="0" eaLnBrk="1" latinLnBrk="0" hangingPunct="1">
+      <a:defRPr sz="1200" kern="1200">
+        <a:solidFill>
+          <a:schemeClr val="tx1"/>
+        </a:solidFill>
+        <a:latin typeface="+mn-lt"/>
+        <a:ea typeface="+mn-ea"/>
+        <a:cs typeface="+mn-cs"/>
+      </a:defRPr>
+    </a:lvl3pPr>
+    <a:lvl4pPr marL="1371600" algn="l" defTabSz="457200" rtl="0" eaLnBrk="1" latinLnBrk="0" hangingPunct="1">
+      <a:defRPr sz="1200" kern="1200">
+        <a:solidFill>
+          <a:schemeClr val="tx1"/>
+        </a:solidFill>
+        <a:latin typeface="+mn-lt"/>
+        <a:ea typeface="+mn-ea"/>
+        <a:cs typeface="+mn-cs"/>
+      </a:defRPr>
+    </a:lvl4pPr>
+    <a:lvl5pPr marL="1828800" algn="l" defTabSz="457200" rtl="0" eaLnBrk="1" latinLnBrk="0" hangingPunct="1">
+      <a:defRPr sz="1200" kern="1200">
+        <a:solidFill>
+          <a:schemeClr val="tx1"/>
+        </a:solidFill>
+        <a:latin typeface="+mn-lt"/>
+        <a:ea typeface="+mn-ea"/>
+        <a:cs typeface="+mn-cs"/>
+      </a:defRPr>
+    </a:lvl5pPr>
+    <a:lvl6pPr marL="2286000" algn="l" defTabSz="457200" rtl="0" eaLnBrk="1" latinLnBrk="0" hangingPunct="1">
+      <a:defRPr sz="1200" kern="1200">
+        <a:solidFill>
+          <a:schemeClr val="tx1"/>
+        </a:solidFill>
+        <a:latin typeface="+mn-lt"/>
+        <a:ea typeface="+mn-ea"/>
+        <a:cs typeface="+mn-cs"/>
+      </a:defRPr>
+    </a:lvl6pPr>
+    <a:lvl7pPr marL="2743200" algn="l" defTabSz="457200" rtl="0" eaLnBrk="1" latinLnBrk="0" hangingPunct="1">
+      <a:defRPr sz="1200" kern="1200">
+        <a:solidFill>
+          <a:schemeClr val="tx1"/>
+        </a:solidFill>
+        <a:latin typeface="+mn-lt"/>
+        <a:ea typeface="+mn-ea"/>
+        <a:cs typeface="+mn-cs"/>
+      </a:defRPr>
+    </a:lvl7pPr>
+    <a:lvl8pPr marL="3200400" algn="l" defTabSz="457200" rtl="0" eaLnBrk="1" latinLnBrk="0" hangingPunct="1">
+      <a:defRPr sz="1200" kern="1200">
+        <a:solidFill>
+          <a:schemeClr val="tx1"/>
+        </a:solidFill>
+        <a:latin typeface="+mn-lt"/>
+        <a:ea typeface="+mn-ea"/>
+        <a:cs typeface="+mn-cs"/>
+      </a:defRPr>
+    </a:lvl8pPr>
+    <a:lvl9pPr marL="3657600" algn="l" defTabSz="457200" rtl="0" eaLnBrk="1" latinLnBrk="0" hangingPunct="1">
+      <a:defRPr sz="1200" kern="1200">
+        <a:solidFill>
+          <a:schemeClr val="tx1"/>
+        </a:solidFill>
+        <a:latin typeface="+mn-lt"/>
+        <a:ea typeface="+mn-ea"/>
+        <a:cs typeface="+mn-cs"/>
+      </a:defRPr>
+    </a:lvl9pPr>
+  </p:notesStyle>
+</p:notesMaster>
+</file>
+
+<file path=ppt/notesSlides/notesSlide1.xml><?xml version="1.0" encoding="utf-8"?>
+<p:notes xmlns:a="http://schemas.openxmlformats.org/drawingml/2006/main" xmlns:p="http://schemas.openxmlformats.org/presentationml/2006/main" xmlns:r="http://schemas.openxmlformats.org/officeDocument/2006/relationships">
+  <p:cSld>
+    <p:spTree>
+      <p:nvGrpSpPr>
+        <p:cNvPr id="1" name=""/>
+        <p:cNvGrpSpPr/>
+        <p:nvPr/>
+      </p:nvGrpSpPr>
+      <p:grpSpPr>
+        <a:xfrm>
+          <a:off x="0" y="0"/>
+          <a:ext cx="0" cy="0"/>
+          <a:chOff x="0" y="0"/>
+          <a:chExt cx="0" cy="0"/>
+        </a:xfrm>
+      </p:grpSpPr>
+      <p:sp>
+        <p:nvSpPr>
+          <p:cNvPr id="2" name="Slide Image Placeholder 1"/>
+          <p:cNvSpPr>
+            <a:spLocks noGrp="1"/>
+          </p:cNvSpPr>
+          <p:nvPr>
+            <p:ph type="sldImg" idx="2"/>
+          </p:nvPr>
+        </p:nvSpPr>
+        <p:spPr/>
+      </p:sp>
+      <p:sp>
+        <p:nvSpPr>
+          <p:cNvPr id="3" name="Notes Placeholder 2"/>
+          <p:cNvSpPr>
+            <a:spLocks noGrp="1"/>
+          </p:cNvSpPr>
+          <p:nvPr>
+            <p:ph type="body" idx="3" sz="quarter"/>
+          </p:nvPr>
+        </p:nvSpPr>
+        <p:spPr/>
+        <p:txBody>
+          <a:bodyPr/>
+          <a:lstStyle/>
+          <a:p>
+            <a:r>
+              <a:t>Bienvenidos a este bloque sobre big data aplicado a leaks. Antes de sacar conclusiones o entrenar cualquier modelo, hay que aprender a mirar los datos: cuánto volumen tenemos, cómo de sucio está y qué patrones estadísticos y de red esconde. En la próxima hora y media vamos a ver estadística descriptiva, análisis de redes sociales y text mining clásico, todo aplicado a foros reales de carding y hacking. La pregunta que quiero que se lleven: ¿por qué explorar antes de modelar nos ahorra errores caros más adelante?</a:t>
+            </a:r>
+          </a:p>
+        </p:txBody>
+      </p:sp>
+      <p:sp>
+        <p:nvSpPr>
+          <p:cNvPr id="4" name="Slide Number Placeholder 3"/>
+          <p:cNvSpPr>
+            <a:spLocks noGrp="1"/>
+          </p:cNvSpPr>
+          <p:nvPr>
+            <p:ph type="sldNum" idx="5" sz="quarter"/>
+          </p:nvPr>
+        </p:nvSpPr>
+        <p:spPr/>
+      </p:sp>
+    </p:spTree>
+  </p:cSld>
+  <p:clrMapOvr>
+    <a:masterClrMapping/>
+  </p:clrMapOvr>
+</p:notes>
+</file>
+
+<file path=ppt/notesSlides/notesSlide10.xml><?xml version="1.0" encoding="utf-8"?>
+<p:notes xmlns:a="http://schemas.openxmlformats.org/drawingml/2006/main" xmlns:p="http://schemas.openxmlformats.org/presentationml/2006/main" xmlns:r="http://schemas.openxmlformats.org/officeDocument/2006/relationships">
+  <p:cSld>
+    <p:spTree>
+      <p:nvGrpSpPr>
+        <p:cNvPr id="1" name=""/>
+        <p:cNvGrpSpPr/>
+        <p:nvPr/>
+      </p:nvGrpSpPr>
+      <p:grpSpPr>
+        <a:xfrm>
+          <a:off x="0" y="0"/>
+          <a:ext cx="0" cy="0"/>
+          <a:chOff x="0" y="0"/>
+          <a:chExt cx="0" cy="0"/>
+        </a:xfrm>
+      </p:grpSpPr>
+      <p:sp>
+        <p:nvSpPr>
+          <p:cNvPr id="2" name="Slide Image Placeholder 1"/>
+          <p:cNvSpPr>
+            <a:spLocks noGrp="1"/>
+          </p:cNvSpPr>
+          <p:nvPr>
+            <p:ph type="sldImg" idx="2"/>
+          </p:nvPr>
+        </p:nvSpPr>
+        <p:spPr/>
+      </p:sp>
+      <p:sp>
+        <p:nvSpPr>
+          <p:cNvPr id="3" name="Notes Placeholder 2"/>
+          <p:cNvSpPr>
+            <a:spLocks noGrp="1"/>
+          </p:cNvSpPr>
+          <p:nvPr>
+            <p:ph type="body" idx="3" sz="quarter"/>
+          </p:nvPr>
+        </p:nvSpPr>
+        <p:spPr/>
+        <p:txBody>
+          <a:bodyPr/>
+          <a:lstStyle/>
+          <a:p>
+            <a:r>
+              <a:t>El tiempo es la dimensión que más se ignora y la que más rápido da pistas. Los patrones horarios revelan la zona horaria real de alguien, sin importar lo que diga su perfil. Los patrones semanales son útiles para distinguir a un profesional, que suele operar en horario laboral, de un aficionado que postea a cualquier hora. Y si miran la evolución anual, van a ver el ciclo de vida completo del foro: crecimiento, madurez y declive, muchas veces justo después de un arresto. Para detectar picos anómalos usamos z-score sobre la serie temporal, con un umbral de media más dos desviaciones estándar.</a:t>
+            </a:r>
+          </a:p>
+        </p:txBody>
+      </p:sp>
+      <p:sp>
+        <p:nvSpPr>
+          <p:cNvPr id="4" name="Slide Number Placeholder 3"/>
+          <p:cNvSpPr>
+            <a:spLocks noGrp="1"/>
+          </p:cNvSpPr>
+          <p:nvPr>
+            <p:ph type="sldNum" idx="5" sz="quarter"/>
+          </p:nvPr>
+        </p:nvSpPr>
+        <p:spPr/>
+      </p:sp>
+    </p:spTree>
+  </p:cSld>
+  <p:clrMapOvr>
+    <a:masterClrMapping/>
+  </p:clrMapOvr>
+</p:notes>
+</file>
+
+<file path=ppt/notesSlides/notesSlide11.xml><?xml version="1.0" encoding="utf-8"?>
+<p:notes xmlns:a="http://schemas.openxmlformats.org/drawingml/2006/main" xmlns:p="http://schemas.openxmlformats.org/presentationml/2006/main" xmlns:r="http://schemas.openxmlformats.org/officeDocument/2006/relationships">
+  <p:cSld>
+    <p:spTree>
+      <p:nvGrpSpPr>
+        <p:cNvPr id="1" name=""/>
+        <p:cNvGrpSpPr/>
+        <p:nvPr/>
+      </p:nvGrpSpPr>
+      <p:grpSpPr>
+        <a:xfrm>
+          <a:off x="0" y="0"/>
+          <a:ext cx="0" cy="0"/>
+          <a:chOff x="0" y="0"/>
+          <a:chExt cx="0" cy="0"/>
+        </a:xfrm>
+      </p:grpSpPr>
+      <p:sp>
+        <p:nvSpPr>
+          <p:cNvPr id="2" name="Slide Image Placeholder 1"/>
+          <p:cNvSpPr>
+            <a:spLocks noGrp="1"/>
+          </p:cNvSpPr>
+          <p:nvPr>
+            <p:ph type="sldImg" idx="2"/>
+          </p:nvPr>
+        </p:nvSpPr>
+        <p:spPr/>
+      </p:sp>
+      <p:sp>
+        <p:nvSpPr>
+          <p:cNvPr id="3" name="Notes Placeholder 2"/>
+          <p:cNvSpPr>
+            <a:spLocks noGrp="1"/>
+          </p:cNvSpPr>
+          <p:nvPr>
+            <p:ph type="body" idx="3" sz="quarter"/>
+          </p:nvPr>
+        </p:nvSpPr>
+        <p:spPr/>
+        <p:txBody>
+          <a:bodyPr/>
+          <a:lstStyle/>
+          <a:p>
+            <a:r>
+              <a:t>Aquí quiero desmontar un mito: no hace falta GPU ni modelos gigantes para sacar información valiosa de texto. Con TF-IDF identificamos los términos más discriminantes por foro o por periodo, y con LDA hacemos topic modeling sin etiquetar nada a mano. Funciona sorprendentemente bien incluso con texto ruidoso y lleno de slang. Pero hay una limitación crítica que quiero que quede clara: si el pipeline de stopwords y tokenización no soporta el idioma del texto, el resultado es basura, texto en ruso con un pipeline en inglés simplemente no va a funcionar.</a:t>
+            </a:r>
+          </a:p>
+        </p:txBody>
+      </p:sp>
+      <p:sp>
+        <p:nvSpPr>
+          <p:cNvPr id="4" name="Slide Number Placeholder 3"/>
+          <p:cNvSpPr>
+            <a:spLocks noGrp="1"/>
+          </p:cNvSpPr>
+          <p:nvPr>
+            <p:ph type="sldNum" idx="5" sz="quarter"/>
+          </p:nvPr>
+        </p:nvSpPr>
+        <p:spPr/>
+      </p:sp>
+    </p:spTree>
+  </p:cSld>
+  <p:clrMapOvr>
+    <a:masterClrMapping/>
+  </p:clrMapOvr>
+</p:notes>
+</file>
+
+<file path=ppt/notesSlides/notesSlide12.xml><?xml version="1.0" encoding="utf-8"?>
+<p:notes xmlns:a="http://schemas.openxmlformats.org/drawingml/2006/main" xmlns:p="http://schemas.openxmlformats.org/presentationml/2006/main" xmlns:r="http://schemas.openxmlformats.org/officeDocument/2006/relationships">
+  <p:cSld>
+    <p:spTree>
+      <p:nvGrpSpPr>
+        <p:cNvPr id="1" name=""/>
+        <p:cNvGrpSpPr/>
+        <p:nvPr/>
+      </p:nvGrpSpPr>
+      <p:grpSpPr>
+        <a:xfrm>
+          <a:off x="0" y="0"/>
+          <a:ext cx="0" cy="0"/>
+          <a:chOff x="0" y="0"/>
+          <a:chExt cx="0" cy="0"/>
+        </a:xfrm>
+      </p:grpSpPr>
+      <p:sp>
+        <p:nvSpPr>
+          <p:cNvPr id="2" name="Slide Image Placeholder 1"/>
+          <p:cNvSpPr>
+            <a:spLocks noGrp="1"/>
+          </p:cNvSpPr>
+          <p:nvPr>
+            <p:ph type="sldImg" idx="2"/>
+          </p:nvPr>
+        </p:nvSpPr>
+        <p:spPr/>
+      </p:sp>
+      <p:sp>
+        <p:nvSpPr>
+          <p:cNvPr id="3" name="Notes Placeholder 2"/>
+          <p:cNvSpPr>
+            <a:spLocks noGrp="1"/>
+          </p:cNvSpPr>
+          <p:nvPr>
+            <p:ph type="body" idx="3" sz="quarter"/>
+          </p:nvPr>
+        </p:nvSpPr>
+        <p:spPr/>
+        <p:txBody>
+          <a:bodyPr/>
+          <a:lstStyle/>
+          <a:p>
+            <a:r>
+              <a:t>Esta tabla resume una pregunta que me hacen mucho: ¿traduzco el texto antes de analizarlo o no? La respuesta depende de la técnica. Para TF-IDF y LDA el idioma importa muchísimo, porque las stopwords en inglés no eliminan preposiciones rusas y sin tokenización correcta los topics salen ruido puro. En cambio, para estadística pura y para análisis de redes el idioma es irrelevante: las fechas, los recuentos y las aristas del grafo no dependen de en qué lengua esté escrito el post.</a:t>
+            </a:r>
+          </a:p>
+        </p:txBody>
+      </p:sp>
+      <p:sp>
+        <p:nvSpPr>
+          <p:cNvPr id="4" name="Slide Number Placeholder 3"/>
+          <p:cNvSpPr>
+            <a:spLocks noGrp="1"/>
+          </p:cNvSpPr>
+          <p:nvPr>
+            <p:ph type="sldNum" idx="5" sz="quarter"/>
+          </p:nvPr>
+        </p:nvSpPr>
+        <p:spPr/>
+      </p:sp>
+    </p:spTree>
+  </p:cSld>
+  <p:clrMapOvr>
+    <a:masterClrMapping/>
+  </p:clrMapOvr>
+</p:notes>
+</file>
+
+<file path=ppt/notesSlides/notesSlide13.xml><?xml version="1.0" encoding="utf-8"?>
+<p:notes xmlns:a="http://schemas.openxmlformats.org/drawingml/2006/main" xmlns:p="http://schemas.openxmlformats.org/presentationml/2006/main" xmlns:r="http://schemas.openxmlformats.org/officeDocument/2006/relationships">
+  <p:cSld>
+    <p:spTree>
+      <p:nvGrpSpPr>
+        <p:cNvPr id="1" name=""/>
+        <p:cNvGrpSpPr/>
+        <p:nvPr/>
+      </p:nvGrpSpPr>
+      <p:grpSpPr>
+        <a:xfrm>
+          <a:off x="0" y="0"/>
+          <a:ext cx="0" cy="0"/>
+          <a:chOff x="0" y="0"/>
+          <a:chExt cx="0" cy="0"/>
+        </a:xfrm>
+      </p:grpSpPr>
+      <p:sp>
+        <p:nvSpPr>
+          <p:cNvPr id="2" name="Slide Image Placeholder 1"/>
+          <p:cNvSpPr>
+            <a:spLocks noGrp="1"/>
+          </p:cNvSpPr>
+          <p:nvPr>
+            <p:ph type="sldImg" idx="2"/>
+          </p:nvPr>
+        </p:nvSpPr>
+        <p:spPr/>
+      </p:sp>
+      <p:sp>
+        <p:nvSpPr>
+          <p:cNvPr id="3" name="Notes Placeholder 2"/>
+          <p:cNvSpPr>
+            <a:spLocks noGrp="1"/>
+          </p:cNvSpPr>
+          <p:nvPr>
+            <p:ph type="body" idx="3" sz="quarter"/>
+          </p:nvPr>
+        </p:nvSpPr>
+        <p:spPr/>
+        <p:txBody>
+          <a:bodyPr/>
+          <a:lstStyle/>
+          <a:p>
+            <a:r>
+              <a:t>Vamos ahora a la parte práctica con el notebook de CardingForums. Vamos a cargar el dataset con auto-detección de formato, sacar la estadística descriptiva básica y luego construir el grafo usuario a usuario a partir de threads compartidos. El momento clave de la demo es cuando calculemos betweenness centrality y veamos en vivo quiénes son los brokers reales del foro. Cerramos con una visualización interactiva en Plotly de los nodos con mayor grado de conexión.</a:t>
+            </a:r>
+          </a:p>
+        </p:txBody>
+      </p:sp>
+      <p:sp>
+        <p:nvSpPr>
+          <p:cNvPr id="4" name="Slide Number Placeholder 3"/>
+          <p:cNvSpPr>
+            <a:spLocks noGrp="1"/>
+          </p:cNvSpPr>
+          <p:nvPr>
+            <p:ph type="sldNum" idx="5" sz="quarter"/>
+          </p:nvPr>
+        </p:nvSpPr>
+        <p:spPr/>
+      </p:sp>
+    </p:spTree>
+  </p:cSld>
+  <p:clrMapOvr>
+    <a:masterClrMapping/>
+  </p:clrMapOvr>
+</p:notes>
+</file>
+
+<file path=ppt/notesSlides/notesSlide2.xml><?xml version="1.0" encoding="utf-8"?>
+<p:notes xmlns:a="http://schemas.openxmlformats.org/drawingml/2006/main" xmlns:p="http://schemas.openxmlformats.org/presentationml/2006/main" xmlns:r="http://schemas.openxmlformats.org/officeDocument/2006/relationships">
+  <p:cSld>
+    <p:spTree>
+      <p:nvGrpSpPr>
+        <p:cNvPr id="1" name=""/>
+        <p:cNvGrpSpPr/>
+        <p:nvPr/>
+      </p:nvGrpSpPr>
+      <p:grpSpPr>
+        <a:xfrm>
+          <a:off x="0" y="0"/>
+          <a:ext cx="0" cy="0"/>
+          <a:chOff x="0" y="0"/>
+          <a:chExt cx="0" cy="0"/>
+        </a:xfrm>
+      </p:grpSpPr>
+      <p:sp>
+        <p:nvSpPr>
+          <p:cNvPr id="2" name="Slide Image Placeholder 1"/>
+          <p:cNvSpPr>
+            <a:spLocks noGrp="1"/>
+          </p:cNvSpPr>
+          <p:nvPr>
+            <p:ph type="sldImg" idx="2"/>
+          </p:nvPr>
+        </p:nvSpPr>
+        <p:spPr/>
+      </p:sp>
+      <p:sp>
+        <p:nvSpPr>
+          <p:cNvPr id="3" name="Notes Placeholder 2"/>
+          <p:cNvSpPr>
+            <a:spLocks noGrp="1"/>
+          </p:cNvSpPr>
+          <p:nvPr>
+            <p:ph type="body" idx="3" sz="quarter"/>
+          </p:nvPr>
+        </p:nvSpPr>
+        <p:spPr/>
+        <p:txBody>
+          <a:bodyPr/>
+          <a:lstStyle/>
+          <a:p>
+            <a:r>
+              <a:t>Empezamos por el problema de escala. Ojo: cuando hablo de big data aquí no me refiero a Hadoop ni a petabytes, sino a datos sucios en volúmenes moderados que igual nos obligan a pensar con cabeza estadística. Vamos a ver por qué la limpieza y la exploración van antes que cualquier análisis sofisticado.</a:t>
+            </a:r>
+          </a:p>
+        </p:txBody>
+      </p:sp>
+      <p:sp>
+        <p:nvSpPr>
+          <p:cNvPr id="4" name="Slide Number Placeholder 3"/>
+          <p:cNvSpPr>
+            <a:spLocks noGrp="1"/>
+          </p:cNvSpPr>
+          <p:nvPr>
+            <p:ph type="sldNum" idx="5" sz="quarter"/>
+          </p:nvPr>
+        </p:nvSpPr>
+        <p:spPr/>
+      </p:sp>
+    </p:spTree>
+  </p:cSld>
+  <p:clrMapOvr>
+    <a:masterClrMapping/>
+  </p:clrMapOvr>
+</p:notes>
+</file>
+
+<file path=ppt/notesSlides/notesSlide3.xml><?xml version="1.0" encoding="utf-8"?>
+<p:notes xmlns:a="http://schemas.openxmlformats.org/drawingml/2006/main" xmlns:p="http://schemas.openxmlformats.org/presentationml/2006/main" xmlns:r="http://schemas.openxmlformats.org/officeDocument/2006/relationships">
+  <p:cSld>
+    <p:spTree>
+      <p:nvGrpSpPr>
+        <p:cNvPr id="1" name=""/>
+        <p:cNvGrpSpPr/>
+        <p:nvPr/>
+      </p:nvGrpSpPr>
+      <p:grpSpPr>
+        <a:xfrm>
+          <a:off x="0" y="0"/>
+          <a:ext cx="0" cy="0"/>
+          <a:chOff x="0" y="0"/>
+          <a:chExt cx="0" cy="0"/>
+        </a:xfrm>
+      </p:grpSpPr>
+      <p:sp>
+        <p:nvSpPr>
+          <p:cNvPr id="2" name="Slide Image Placeholder 1"/>
+          <p:cNvSpPr>
+            <a:spLocks noGrp="1"/>
+          </p:cNvSpPr>
+          <p:nvPr>
+            <p:ph type="sldImg" idx="2"/>
+          </p:nvPr>
+        </p:nvSpPr>
+        <p:spPr/>
+      </p:sp>
+      <p:sp>
+        <p:nvSpPr>
+          <p:cNvPr id="3" name="Notes Placeholder 2"/>
+          <p:cNvSpPr>
+            <a:spLocks noGrp="1"/>
+          </p:cNvSpPr>
+          <p:nvPr>
+            <p:ph type="body" idx="3" sz="quarter"/>
+          </p:nvPr>
+        </p:nvSpPr>
+        <p:spPr/>
+        <p:txBody>
+          <a:bodyPr/>
+          <a:lstStyle/>
+          <a:p>
+            <a:r>
+              <a:t>Quiero dejar clara una expectativa desde el principio: aquí no vamos a montar un cluster Hadoop, hablamos de millones de registros manejables en una máquina normal. El problema real no es el volumen, es la suciedad: schemas inconsistentes, duplicados, texto en varios idiomas. Fíjense en la power-law: en casi todos los foros que analizamos, un 1% de usuarios genera el 80% del contenido, esto cambia completamente cómo hay que interpretar cualquier métrica agregada. Por eso la regla de oro es explorar la forma del dataset antes de aplicar ningún modelo; si se saltan este paso, van a sacar conclusiones equivocadas sin darse cuenta.</a:t>
+            </a:r>
+          </a:p>
+        </p:txBody>
+      </p:sp>
+      <p:sp>
+        <p:nvSpPr>
+          <p:cNvPr id="4" name="Slide Number Placeholder 3"/>
+          <p:cNvSpPr>
+            <a:spLocks noGrp="1"/>
+          </p:cNvSpPr>
+          <p:nvPr>
+            <p:ph type="sldNum" idx="5" sz="quarter"/>
+          </p:nvPr>
+        </p:nvSpPr>
+        <p:spPr/>
+      </p:sp>
+    </p:spTree>
+  </p:cSld>
+  <p:clrMapOvr>
+    <a:masterClrMapping/>
+  </p:clrMapOvr>
+</p:notes>
+</file>
+
+<file path=ppt/notesSlides/notesSlide4.xml><?xml version="1.0" encoding="utf-8"?>
+<p:notes xmlns:a="http://schemas.openxmlformats.org/drawingml/2006/main" xmlns:p="http://schemas.openxmlformats.org/presentationml/2006/main" xmlns:r="http://schemas.openxmlformats.org/officeDocument/2006/relationships">
+  <p:cSld>
+    <p:spTree>
+      <p:nvGrpSpPr>
+        <p:cNvPr id="1" name=""/>
+        <p:cNvGrpSpPr/>
+        <p:nvPr/>
+      </p:nvGrpSpPr>
+      <p:grpSpPr>
+        <a:xfrm>
+          <a:off x="0" y="0"/>
+          <a:ext cx="0" cy="0"/>
+          <a:chOff x="0" y="0"/>
+          <a:chExt cx="0" cy="0"/>
+        </a:xfrm>
+      </p:grpSpPr>
+      <p:sp>
+        <p:nvSpPr>
+          <p:cNvPr id="2" name="Slide Image Placeholder 1"/>
+          <p:cNvSpPr>
+            <a:spLocks noGrp="1"/>
+          </p:cNvSpPr>
+          <p:nvPr>
+            <p:ph type="sldImg" idx="2"/>
+          </p:nvPr>
+        </p:nvSpPr>
+        <p:spPr/>
+      </p:sp>
+      <p:sp>
+        <p:nvSpPr>
+          <p:cNvPr id="3" name="Notes Placeholder 2"/>
+          <p:cNvSpPr>
+            <a:spLocks noGrp="1"/>
+          </p:cNvSpPr>
+          <p:nvPr>
+            <p:ph type="body" idx="3" sz="quarter"/>
+          </p:nvPr>
+        </p:nvSpPr>
+        <p:spPr/>
+        <p:txBody>
+          <a:bodyPr/>
+          <a:lstStyle/>
+          <a:p>
+            <a:r>
+              <a:t>Estas son las métricas que yo pido siempre, sin excepción, antes de tocar nada más sofisticado. La distribución de actividad por usuario casi nunca es normal, es asimétrica, así que la media sola no dice nada, necesitan ver la distribución completa. Un truco importante: la zona horaria de los timestamps nos da pistas geográficas más fiables que lo que el propio usuario declara en su perfil. Y por favor, validen siempre los rangos: si ven timestamps en 1970, no es que el foro tenga 50 años, es un epoch corrupto en cero. Validar recuentos también es clave, si esperaban 10.000 usuarios y cargaron 200, algo falló en la ingesta.</a:t>
+            </a:r>
+          </a:p>
+        </p:txBody>
+      </p:sp>
+      <p:sp>
+        <p:nvSpPr>
+          <p:cNvPr id="4" name="Slide Number Placeholder 3"/>
+          <p:cNvSpPr>
+            <a:spLocks noGrp="1"/>
+          </p:cNvSpPr>
+          <p:nvPr>
+            <p:ph type="sldNum" idx="5" sz="quarter"/>
+          </p:nvPr>
+        </p:nvSpPr>
+        <p:spPr/>
+      </p:sp>
+    </p:spTree>
+  </p:cSld>
+  <p:clrMapOvr>
+    <a:masterClrMapping/>
+  </p:clrMapOvr>
+</p:notes>
+</file>
+
+<file path=ppt/notesSlides/notesSlide5.xml><?xml version="1.0" encoding="utf-8"?>
+<p:notes xmlns:a="http://schemas.openxmlformats.org/drawingml/2006/main" xmlns:p="http://schemas.openxmlformats.org/presentationml/2006/main" xmlns:r="http://schemas.openxmlformats.org/officeDocument/2006/relationships">
+  <p:cSld>
+    <p:spTree>
+      <p:nvGrpSpPr>
+        <p:cNvPr id="1" name=""/>
+        <p:cNvGrpSpPr/>
+        <p:nvPr/>
+      </p:nvGrpSpPr>
+      <p:grpSpPr>
+        <a:xfrm>
+          <a:off x="0" y="0"/>
+          <a:ext cx="0" cy="0"/>
+          <a:chOff x="0" y="0"/>
+          <a:chExt cx="0" cy="0"/>
+        </a:xfrm>
+      </p:grpSpPr>
+      <p:sp>
+        <p:nvSpPr>
+          <p:cNvPr id="2" name="Slide Image Placeholder 1"/>
+          <p:cNvSpPr>
+            <a:spLocks noGrp="1"/>
+          </p:cNvSpPr>
+          <p:nvPr>
+            <p:ph type="sldImg" idx="2"/>
+          </p:nvPr>
+        </p:nvSpPr>
+        <p:spPr/>
+      </p:sp>
+      <p:sp>
+        <p:nvSpPr>
+          <p:cNvPr id="3" name="Notes Placeholder 2"/>
+          <p:cNvSpPr>
+            <a:spLocks noGrp="1"/>
+          </p:cNvSpPr>
+          <p:nvPr>
+            <p:ph type="body" idx="3" sz="quarter"/>
+          </p:nvPr>
+        </p:nvSpPr>
+        <p:spPr/>
+        <p:txBody>
+          <a:bodyPr/>
+          <a:lstStyle/>
+          <a:p>
+            <a:r>
+              <a:t>Pasamos a redes sociales. La idea central de esta sección es simple pero potente: un foro no es solo texto, es un grafo. Cada respuesta es una conexión entre personas, y esas conexiones nos dicen quién manda, quién conecta grupos y quién pasa desapercibido pese a ser clave.</a:t>
+            </a:r>
+          </a:p>
+        </p:txBody>
+      </p:sp>
+      <p:sp>
+        <p:nvSpPr>
+          <p:cNvPr id="4" name="Slide Number Placeholder 3"/>
+          <p:cNvSpPr>
+            <a:spLocks noGrp="1"/>
+          </p:cNvSpPr>
+          <p:nvPr>
+            <p:ph type="sldNum" idx="5" sz="quarter"/>
+          </p:nvPr>
+        </p:nvSpPr>
+        <p:spPr/>
+      </p:sp>
+    </p:spTree>
+  </p:cSld>
+  <p:clrMapOvr>
+    <a:masterClrMapping/>
+  </p:clrMapOvr>
+</p:notes>
+</file>
+
+<file path=ppt/notesSlides/notesSlide6.xml><?xml version="1.0" encoding="utf-8"?>
+<p:notes xmlns:a="http://schemas.openxmlformats.org/drawingml/2006/main" xmlns:p="http://schemas.openxmlformats.org/presentationml/2006/main" xmlns:r="http://schemas.openxmlformats.org/officeDocument/2006/relationships">
+  <p:cSld>
+    <p:spTree>
+      <p:nvGrpSpPr>
+        <p:cNvPr id="1" name=""/>
+        <p:cNvGrpSpPr/>
+        <p:nvPr/>
+      </p:nvGrpSpPr>
+      <p:grpSpPr>
+        <a:xfrm>
+          <a:off x="0" y="0"/>
+          <a:ext cx="0" cy="0"/>
+          <a:chOff x="0" y="0"/>
+          <a:chExt cx="0" cy="0"/>
+        </a:xfrm>
+      </p:grpSpPr>
+      <p:sp>
+        <p:nvSpPr>
+          <p:cNvPr id="2" name="Slide Image Placeholder 1"/>
+          <p:cNvSpPr>
+            <a:spLocks noGrp="1"/>
+          </p:cNvSpPr>
+          <p:nvPr>
+            <p:ph type="sldImg" idx="2"/>
+          </p:nvPr>
+        </p:nvSpPr>
+        <p:spPr/>
+      </p:sp>
+      <p:sp>
+        <p:nvSpPr>
+          <p:cNvPr id="3" name="Notes Placeholder 2"/>
+          <p:cNvSpPr>
+            <a:spLocks noGrp="1"/>
+          </p:cNvSpPr>
+          <p:nvPr>
+            <p:ph type="body" idx="3" sz="quarter"/>
+          </p:nvPr>
+        </p:nvSpPr>
+        <p:spPr/>
+        <p:txBody>
+          <a:bodyPr/>
+          <a:lstStyle/>
+          <a:p>
+            <a:r>
+              <a:t>Aquí construimos el grafo más básico: cada respuesta en un hilo es una arista dirigida entre dos usuarios. Con eso ya podemos calcular degree centrality, que nos dice quién tiene más conexiones directas, pero la métrica que de verdad me interesa es betweenness centrality, porque identifica a los brokers, los que conectan subgrupos que si no estarían aislados. Usamos Louvain para detectar comunidades sin tener que decidir a mano cuántos grupos buscar, y todo esto se visualiza con NetworkX y Plotly sin depender de ningún servidor externo. Eso sí, sean honestos con la limitación: trabajamos con una muestra de 5.000 threads porque un grafo completo no entra en RAM de forma razonable.</a:t>
+            </a:r>
+          </a:p>
+        </p:txBody>
+      </p:sp>
+      <p:sp>
+        <p:nvSpPr>
+          <p:cNvPr id="4" name="Slide Number Placeholder 3"/>
+          <p:cNvSpPr>
+            <a:spLocks noGrp="1"/>
+          </p:cNvSpPr>
+          <p:nvPr>
+            <p:ph type="sldNum" idx="5" sz="quarter"/>
+          </p:nvPr>
+        </p:nvSpPr>
+        <p:spPr/>
+      </p:sp>
+    </p:spTree>
+  </p:cSld>
+  <p:clrMapOvr>
+    <a:masterClrMapping/>
+  </p:clrMapOvr>
+</p:notes>
+</file>
+
+<file path=ppt/notesSlides/notesSlide7.xml><?xml version="1.0" encoding="utf-8"?>
+<p:notes xmlns:a="http://schemas.openxmlformats.org/drawingml/2006/main" xmlns:p="http://schemas.openxmlformats.org/presentationml/2006/main" xmlns:r="http://schemas.openxmlformats.org/officeDocument/2006/relationships">
+  <p:cSld>
+    <p:spTree>
+      <p:nvGrpSpPr>
+        <p:cNvPr id="1" name=""/>
+        <p:cNvGrpSpPr/>
+        <p:nvPr/>
+      </p:nvGrpSpPr>
+      <p:grpSpPr>
+        <a:xfrm>
+          <a:off x="0" y="0"/>
+          <a:ext cx="0" cy="0"/>
+          <a:chOff x="0" y="0"/>
+          <a:chExt cx="0" cy="0"/>
+        </a:xfrm>
+      </p:grpSpPr>
+      <p:sp>
+        <p:nvSpPr>
+          <p:cNvPr id="2" name="Slide Image Placeholder 1"/>
+          <p:cNvSpPr>
+            <a:spLocks noGrp="1"/>
+          </p:cNvSpPr>
+          <p:nvPr>
+            <p:ph type="sldImg" idx="2"/>
+          </p:nvPr>
+        </p:nvSpPr>
+        <p:spPr/>
+      </p:sp>
+      <p:sp>
+        <p:nvSpPr>
+          <p:cNvPr id="3" name="Notes Placeholder 2"/>
+          <p:cNvSpPr>
+            <a:spLocks noGrp="1"/>
+          </p:cNvSpPr>
+          <p:nvPr>
+            <p:ph type="body" idx="3" sz="quarter"/>
+          </p:nvPr>
+        </p:nvSpPr>
+        <p:spPr/>
+        <p:txBody>
+          <a:bodyPr/>
+          <a:lstStyle/>
+          <a:p>
+            <a:r>
+              <a:t>Quiero que noten la diferencia entre estas dos redes porque es fácil confundirlas. La red pública, la de hilos y posts, refleja reputación visible, pero está sesgada hacia los usuarios más activos y ruidosos. La red privada, la de mensajes directos, es muchísimo más rara de encontrar en un leak, pero cuando aparece es oro puro porque refleja confianza real entre actores. Y este es el dato que más sorprende a los alumnos: el broker de la red pública casi nunca coincide con el broker de la red privada.</a:t>
+            </a:r>
+          </a:p>
+        </p:txBody>
+      </p:sp>
+      <p:sp>
+        <p:nvSpPr>
+          <p:cNvPr id="4" name="Slide Number Placeholder 3"/>
+          <p:cNvSpPr>
+            <a:spLocks noGrp="1"/>
+          </p:cNvSpPr>
+          <p:nvPr>
+            <p:ph type="sldNum" idx="5" sz="quarter"/>
+          </p:nvPr>
+        </p:nvSpPr>
+        <p:spPr/>
+      </p:sp>
+    </p:spTree>
+  </p:cSld>
+  <p:clrMapOvr>
+    <a:masterClrMapping/>
+  </p:clrMapOvr>
+</p:notes>
+</file>
+
+<file path=ppt/notesSlides/notesSlide8.xml><?xml version="1.0" encoding="utf-8"?>
+<p:notes xmlns:a="http://schemas.openxmlformats.org/drawingml/2006/main" xmlns:p="http://schemas.openxmlformats.org/presentationml/2006/main" xmlns:r="http://schemas.openxmlformats.org/officeDocument/2006/relationships">
+  <p:cSld>
+    <p:spTree>
+      <p:nvGrpSpPr>
+        <p:cNvPr id="1" name=""/>
+        <p:cNvGrpSpPr/>
+        <p:nvPr/>
+      </p:nvGrpSpPr>
+      <p:grpSpPr>
+        <a:xfrm>
+          <a:off x="0" y="0"/>
+          <a:ext cx="0" cy="0"/>
+          <a:chOff x="0" y="0"/>
+          <a:chExt cx="0" cy="0"/>
+        </a:xfrm>
+      </p:grpSpPr>
+      <p:sp>
+        <p:nvSpPr>
+          <p:cNvPr id="2" name="Slide Image Placeholder 1"/>
+          <p:cNvSpPr>
+            <a:spLocks noGrp="1"/>
+          </p:cNvSpPr>
+          <p:nvPr>
+            <p:ph type="sldImg" idx="2"/>
+          </p:nvPr>
+        </p:nvSpPr>
+        <p:spPr/>
+      </p:sp>
+      <p:sp>
+        <p:nvSpPr>
+          <p:cNvPr id="3" name="Notes Placeholder 2"/>
+          <p:cNvSpPr>
+            <a:spLocks noGrp="1"/>
+          </p:cNvSpPr>
+          <p:nvPr>
+            <p:ph type="body" idx="3" sz="quarter"/>
+          </p:nvPr>
+        </p:nvSpPr>
+        <p:spPr/>
+        <p:txBody>
+          <a:bodyPr/>
+          <a:lstStyle/>
+          <a:p>
+            <a:r>
+              <a:t>Esto es, para mí, el análisis más potente de todo el bloque. Partimos de una hipótesis razonable: los operadores reutilizan handles, correos y patrones de comportamiento entre plataformas, aunque intenten disimularlo. El proceso tiene tres pasos: primero normalizamos identidades, después aplicamos matching exacto para quedarnos con coincidencias de alta confianza, y por último fuzzy matching con rapidfuzz para cazar variaciones deliberadas. El resultado final es un grafo de identidades donde un mismo nodo puede representar al mismo actor en varias plataformas distintas, esto es la base de cualquier investigación cross-foro seria.</a:t>
+            </a:r>
+          </a:p>
+        </p:txBody>
+      </p:sp>
+      <p:sp>
+        <p:nvSpPr>
+          <p:cNvPr id="4" name="Slide Number Placeholder 3"/>
+          <p:cNvSpPr>
+            <a:spLocks noGrp="1"/>
+          </p:cNvSpPr>
+          <p:nvPr>
+            <p:ph type="sldNum" idx="5" sz="quarter"/>
+          </p:nvPr>
+        </p:nvSpPr>
+        <p:spPr/>
+      </p:sp>
+    </p:spTree>
+  </p:cSld>
+  <p:clrMapOvr>
+    <a:masterClrMapping/>
+  </p:clrMapOvr>
+</p:notes>
+</file>
+
+<file path=ppt/notesSlides/notesSlide9.xml><?xml version="1.0" encoding="utf-8"?>
+<p:notes xmlns:a="http://schemas.openxmlformats.org/drawingml/2006/main" xmlns:p="http://schemas.openxmlformats.org/presentationml/2006/main" xmlns:r="http://schemas.openxmlformats.org/officeDocument/2006/relationships">
+  <p:cSld>
+    <p:spTree>
+      <p:nvGrpSpPr>
+        <p:cNvPr id="1" name=""/>
+        <p:cNvGrpSpPr/>
+        <p:nvPr/>
+      </p:nvGrpSpPr>
+      <p:grpSpPr>
+        <a:xfrm>
+          <a:off x="0" y="0"/>
+          <a:ext cx="0" cy="0"/>
+          <a:chOff x="0" y="0"/>
+          <a:chExt cx="0" cy="0"/>
+        </a:xfrm>
+      </p:grpSpPr>
+      <p:sp>
+        <p:nvSpPr>
+          <p:cNvPr id="2" name="Slide Image Placeholder 1"/>
+          <p:cNvSpPr>
+            <a:spLocks noGrp="1"/>
+          </p:cNvSpPr>
+          <p:nvPr>
+            <p:ph type="sldImg" idx="2"/>
+          </p:nvPr>
+        </p:nvSpPr>
+        <p:spPr/>
+      </p:sp>
+      <p:sp>
+        <p:nvSpPr>
+          <p:cNvPr id="3" name="Notes Placeholder 2"/>
+          <p:cNvSpPr>
+            <a:spLocks noGrp="1"/>
+          </p:cNvSpPr>
+          <p:nvPr>
+            <p:ph type="body" idx="3" sz="quarter"/>
+          </p:nvPr>
+        </p:nvSpPr>
+        <p:spPr/>
+        <p:txBody>
+          <a:bodyPr/>
+          <a:lstStyle/>
+          <a:p>
+            <a:r>
+              <a:t>Cerramos el bloque con dos técnicas que suelen infravalorarse: el tiempo y la frecuencia de palabras. Antes de meterse en semántica compleja, hay muchísima información en cuándo se escribió algo y qué palabras se repiten.</a:t>
+            </a:r>
+          </a:p>
+        </p:txBody>
+      </p:sp>
+      <p:sp>
+        <p:nvSpPr>
+          <p:cNvPr id="4" name="Slide Number Placeholder 3"/>
+          <p:cNvSpPr>
+            <a:spLocks noGrp="1"/>
+          </p:cNvSpPr>
+          <p:nvPr>
+            <p:ph type="sldNum" idx="5" sz="quarter"/>
+          </p:nvPr>
+        </p:nvSpPr>
+        <p:spPr/>
+      </p:sp>
+    </p:spTree>
+  </p:cSld>
+  <p:clrMapOvr>
+    <a:masterClrMapping/>
+  </p:clrMapOvr>
+</p:notes>
 </file>
 
 <file path=ppt/slideLayouts/slideLayout1.xml><?xml version="1.0" encoding="utf-8"?>
@@ -7068,4 +8328,324 @@
   </a:objectDefaults>
   <a:extraClrSchemeLst/>
 </a:theme>
+</file>
+
+<file path=ppt/theme/theme2.xml><?xml version="1.0" encoding="utf-8"?>
+<a:theme xmlns:a="http://schemas.openxmlformats.org/drawingml/2006/main" name="Office Theme">
+  <a:themeElements>
+    <a:clrScheme name="Office">
+      <a:dk1>
+        <a:sysClr val="windowText" lastClr="000000"/>
+      </a:dk1>
+      <a:lt1>
+        <a:sysClr val="window" lastClr="FFFFFF"/>
+      </a:lt1>
+      <a:dk2>
+        <a:srgbClr val="1F497D"/>
+      </a:dk2>
+      <a:lt2>
+        <a:srgbClr val="EEECE1"/>
+      </a:lt2>
+      <a:accent1>
+        <a:srgbClr val="4F81BD"/>
+      </a:accent1>
+      <a:accent2>
+        <a:srgbClr val="C0504D"/>
+      </a:accent2>
+      <a:accent3>
+        <a:srgbClr val="9BBB59"/>
+      </a:accent3>
+      <a:accent4>
+        <a:srgbClr val="8064A2"/>
+      </a:accent4>
+      <a:accent5>
+        <a:srgbClr val="4BACC6"/>
+      </a:accent5>
+      <a:accent6>
+        <a:srgbClr val="F79646"/>
+      </a:accent6>
+      <a:hlink>
+        <a:srgbClr val="0000FF"/>
+      </a:hlink>
+      <a:folHlink>
+        <a:srgbClr val="800080"/>
+      </a:folHlink>
+    </a:clrScheme>
+    <a:fontScheme name="Office">
+      <a:majorFont>
+        <a:latin typeface="Calibri"/>
+        <a:ea typeface=""/>
+        <a:cs typeface=""/>
+        <a:font script="Jpan" typeface="ＭＳ Ｐゴシック"/>
+        <a:font script="Hang" typeface="맑은 고딕"/>
+        <a:font script="Hans" typeface="宋体"/>
+        <a:font script="Hant" typeface="新細明體"/>
+        <a:font script="Arab" typeface="Times New Roman"/>
+        <a:font script="Hebr" typeface="Times New Roman"/>
+        <a:font script="Thai" typeface="Angsana New"/>
+        <a:font script="Ethi" typeface="Nyala"/>
+        <a:font script="Beng" typeface="Vrinda"/>
+        <a:font script="Gujr" typeface="Shruti"/>
+        <a:font script="Khmr" typeface="MoolBoran"/>
+        <a:font script="Knda" typeface="Tunga"/>
+        <a:font script="Guru" typeface="Raavi"/>
+        <a:font script="Cans" typeface="Euphemia"/>
+        <a:font script="Cher" typeface="Plantagenet Cherokee"/>
+        <a:font script="Yiii" typeface="Microsoft Yi Baiti"/>
+        <a:font script="Tibt" typeface="Microsoft Himalaya"/>
+        <a:font script="Thaa" typeface="MV Boli"/>
+        <a:font script="Deva" typeface="Mangal"/>
+        <a:font script="Telu" typeface="Gautami"/>
+        <a:font script="Taml" typeface="Latha"/>
+        <a:font script="Syrc" typeface="Estrangelo Edessa"/>
+        <a:font script="Orya" typeface="Kalinga"/>
+        <a:font script="Mlym" typeface="Kartika"/>
+        <a:font script="Laoo" typeface="DokChampa"/>
+        <a:font script="Sinh" typeface="Iskoola Pota"/>
+        <a:font script="Mong" typeface="Mongolian Baiti"/>
+        <a:font script="Viet" typeface="Times New Roman"/>
+        <a:font script="Uigh" typeface="Microsoft Uighur"/>
+        <a:font script="Geor" typeface="Sylfaen"/>
+      </a:majorFont>
+      <a:minorFont>
+        <a:latin typeface="Calibri"/>
+        <a:ea typeface=""/>
+        <a:cs typeface=""/>
+        <a:font script="Jpan" typeface="ＭＳ Ｐゴシック"/>
+        <a:font script="Hang" typeface="맑은 고딕"/>
+        <a:font script="Hans" typeface="宋体"/>
+        <a:font script="Hant" typeface="新細明體"/>
+        <a:font script="Arab" typeface="Arial"/>
+        <a:font script="Hebr" typeface="Arial"/>
+        <a:font script="Thai" typeface="Cordia New"/>
+        <a:font script="Ethi" typeface="Nyala"/>
+        <a:font script="Beng" typeface="Vrinda"/>
+        <a:font script="Gujr" typeface="Shruti"/>
+        <a:font script="Khmr" typeface="DaunPenh"/>
+        <a:font script="Knda" typeface="Tunga"/>
+        <a:font script="Guru" typeface="Raavi"/>
+        <a:font script="Cans" typeface="Euphemia"/>
+        <a:font script="Cher" typeface="Plantagenet Cherokee"/>
+        <a:font script="Yiii" typeface="Microsoft Yi Baiti"/>
+        <a:font script="Tibt" typeface="Microsoft Himalaya"/>
+        <a:font script="Thaa" typeface="MV Boli"/>
+        <a:font script="Deva" typeface="Mangal"/>
+        <a:font script="Telu" typeface="Gautami"/>
+        <a:font script="Taml" typeface="Latha"/>
+        <a:font script="Syrc" typeface="Estrangelo Edessa"/>
+        <a:font script="Orya" typeface="Kalinga"/>
+        <a:font script="Mlym" typeface="Kartika"/>
+        <a:font script="Laoo" typeface="DokChampa"/>
+        <a:font script="Sinh" typeface="Iskoola Pota"/>
+        <a:font script="Mong" typeface="Mongolian Baiti"/>
+        <a:font script="Viet" typeface="Arial"/>
+        <a:font script="Uigh" typeface="Microsoft Uighur"/>
+        <a:font script="Geor" typeface="Sylfaen"/>
+      </a:minorFont>
+    </a:fontScheme>
+    <a:fmtScheme name="Office">
+      <a:fillStyleLst>
+        <a:solidFill>
+          <a:schemeClr val="phClr"/>
+        </a:solidFill>
+        <a:gradFill rotWithShape="1">
+          <a:gsLst>
+            <a:gs pos="0">
+              <a:schemeClr val="phClr">
+                <a:tint val="50000"/>
+                <a:satMod val="300000"/>
+              </a:schemeClr>
+            </a:gs>
+            <a:gs pos="35000">
+              <a:schemeClr val="phClr">
+                <a:tint val="37000"/>
+                <a:satMod val="300000"/>
+              </a:schemeClr>
+            </a:gs>
+            <a:gs pos="100000">
+              <a:schemeClr val="phClr">
+                <a:tint val="15000"/>
+                <a:satMod val="350000"/>
+              </a:schemeClr>
+            </a:gs>
+          </a:gsLst>
+          <a:lin ang="16200000" scaled="1"/>
+        </a:gradFill>
+        <a:gradFill rotWithShape="1">
+          <a:gsLst>
+            <a:gs pos="0">
+              <a:schemeClr val="phClr">
+                <a:tint val="100000"/>
+                <a:shade val="100000"/>
+                <a:satMod val="130000"/>
+              </a:schemeClr>
+            </a:gs>
+            <a:gs pos="100000">
+              <a:schemeClr val="phClr">
+                <a:tint val="50000"/>
+                <a:shade val="100000"/>
+                <a:satMod val="350000"/>
+              </a:schemeClr>
+            </a:gs>
+          </a:gsLst>
+          <a:lin ang="16200000" scaled="0"/>
+        </a:gradFill>
+      </a:fillStyleLst>
+      <a:lnStyleLst>
+        <a:ln w="9525" cap="flat" cmpd="sng" algn="ctr">
+          <a:solidFill>
+            <a:schemeClr val="phClr">
+              <a:shade val="95000"/>
+              <a:satMod val="105000"/>
+            </a:schemeClr>
+          </a:solidFill>
+          <a:prstDash val="solid"/>
+        </a:ln>
+        <a:ln w="25400" cap="flat" cmpd="sng" algn="ctr">
+          <a:solidFill>
+            <a:schemeClr val="phClr"/>
+          </a:solidFill>
+          <a:prstDash val="solid"/>
+        </a:ln>
+        <a:ln w="38100" cap="flat" cmpd="sng" algn="ctr">
+          <a:solidFill>
+            <a:schemeClr val="phClr"/>
+          </a:solidFill>
+          <a:prstDash val="solid"/>
+        </a:ln>
+      </a:lnStyleLst>
+      <a:effectStyleLst>
+        <a:effectStyle>
+          <a:effectLst>
+            <a:outerShdw blurRad="40000" dist="20000" dir="5400000" rotWithShape="0">
+              <a:srgbClr val="000000">
+                <a:alpha val="38000"/>
+              </a:srgbClr>
+            </a:outerShdw>
+          </a:effectLst>
+        </a:effectStyle>
+        <a:effectStyle>
+          <a:effectLst>
+            <a:outerShdw blurRad="40000" dist="23000" dir="5400000" rotWithShape="0">
+              <a:srgbClr val="000000">
+                <a:alpha val="35000"/>
+              </a:srgbClr>
+            </a:outerShdw>
+          </a:effectLst>
+        </a:effectStyle>
+        <a:effectStyle>
+          <a:effectLst>
+            <a:outerShdw blurRad="40000" dist="23000" dir="5400000" rotWithShape="0">
+              <a:srgbClr val="000000">
+                <a:alpha val="35000"/>
+              </a:srgbClr>
+            </a:outerShdw>
+          </a:effectLst>
+          <a:scene3d>
+            <a:camera prst="orthographicFront">
+              <a:rot lat="0" lon="0" rev="0"/>
+            </a:camera>
+            <a:lightRig rig="threePt" dir="t">
+              <a:rot lat="0" lon="0" rev="1200000"/>
+            </a:lightRig>
+          </a:scene3d>
+          <a:sp3d>
+            <a:bevelT w="63500" h="25400"/>
+          </a:sp3d>
+        </a:effectStyle>
+      </a:effectStyleLst>
+      <a:bgFillStyleLst>
+        <a:solidFill>
+          <a:schemeClr val="phClr"/>
+        </a:solidFill>
+        <a:gradFill rotWithShape="1">
+          <a:gsLst>
+            <a:gs pos="0">
+              <a:schemeClr val="phClr">
+                <a:tint val="40000"/>
+                <a:satMod val="350000"/>
+              </a:schemeClr>
+            </a:gs>
+            <a:gs pos="40000">
+              <a:schemeClr val="phClr">
+                <a:tint val="45000"/>
+                <a:shade val="99000"/>
+                <a:satMod val="350000"/>
+              </a:schemeClr>
+            </a:gs>
+            <a:gs pos="100000">
+              <a:schemeClr val="phClr">
+                <a:shade val="20000"/>
+                <a:satMod val="255000"/>
+              </a:schemeClr>
+            </a:gs>
+          </a:gsLst>
+          <a:path path="circle">
+            <a:fillToRect l="50000" t="-80000" r="50000" b="180000"/>
+          </a:path>
+        </a:gradFill>
+        <a:gradFill rotWithShape="1">
+          <a:gsLst>
+            <a:gs pos="0">
+              <a:schemeClr val="phClr">
+                <a:tint val="80000"/>
+                <a:satMod val="300000"/>
+              </a:schemeClr>
+            </a:gs>
+            <a:gs pos="100000">
+              <a:schemeClr val="phClr">
+                <a:shade val="30000"/>
+                <a:satMod val="200000"/>
+              </a:schemeClr>
+            </a:gs>
+          </a:gsLst>
+          <a:path path="circle">
+            <a:fillToRect l="50000" t="50000" r="50000" b="50000"/>
+          </a:path>
+        </a:gradFill>
+      </a:bgFillStyleLst>
+    </a:fmtScheme>
+  </a:themeElements>
+  <a:objectDefaults>
+    <a:spDef>
+      <a:spPr/>
+      <a:bodyPr/>
+      <a:lstStyle/>
+      <a:style>
+        <a:lnRef idx="1">
+          <a:schemeClr val="accent1"/>
+        </a:lnRef>
+        <a:fillRef idx="3">
+          <a:schemeClr val="accent1"/>
+        </a:fillRef>
+        <a:effectRef idx="2">
+          <a:schemeClr val="accent1"/>
+        </a:effectRef>
+        <a:fontRef idx="minor">
+          <a:schemeClr val="lt1"/>
+        </a:fontRef>
+      </a:style>
+    </a:spDef>
+    <a:lnDef>
+      <a:spPr/>
+      <a:bodyPr/>
+      <a:lstStyle/>
+      <a:style>
+        <a:lnRef idx="2">
+          <a:schemeClr val="accent1"/>
+        </a:lnRef>
+        <a:fillRef idx="0">
+          <a:schemeClr val="accent1"/>
+        </a:fillRef>
+        <a:effectRef idx="1">
+          <a:schemeClr val="accent1"/>
+        </a:effectRef>
+        <a:fontRef idx="minor">
+          <a:schemeClr val="tx1"/>
+        </a:fontRef>
+      </a:style>
+    </a:lnDef>
+  </a:objectDefaults>
+  <a:extraClrSchemeLst/>
+</a:theme>
 </file>
--- a/bloque1_bigdata/csbc26_b1_bigdata.pptx
+++ b/bloque1_bigdata/csbc26_b1_bigdata.pptx
@@ -5398,12 +5398,6 @@
           <a:lstStyle/>
           <a:p>
             <a:r>
-              <a:rPr sz="3400" b="1">
-                <a:solidFill>
-                  <a:srgbClr val="FFFFFF"/>
-                </a:solidFill>
-                <a:latin typeface="Calibri"/>
-              </a:rPr>
               <a:t>Técnicas de análisis: Big Data</a:t>
             </a:r>
           </a:p>
@@ -5413,7 +5407,7 @@
                 <a:solidFill>
                   <a:srgbClr val="D6DAE2"/>
                 </a:solidFill>
-                <a:latin typeface="Calibri"/>
+                <a:latin typeface="Arial"/>
               </a:rPr>
               <a:t>Explorar antes de modelar — estadística, redes y text mining</a:t>
             </a:r>
@@ -5424,7 +5418,7 @@
                 <a:solidFill>
                   <a:srgbClr val="9AA3B5"/>
                 </a:solidFill>
-                <a:latin typeface="Calibri"/>
+                <a:latin typeface="Arial"/>
               </a:rPr>
               <a:t>CSBC26 · Bloque 1 · 1h 30min</a:t>
             </a:r>
@@ -5465,12 +5459,6 @@
           <a:lstStyle/>
           <a:p>
             <a:r>
-              <a:rPr sz="2400" b="1">
-                <a:solidFill>
-                  <a:srgbClr val="1A1A2E"/>
-                </a:solidFill>
-                <a:latin typeface="Calibri"/>
-              </a:rPr>
               <a:t>Análisis temporal — la dimensión más ignorada</a:t>
             </a:r>
           </a:p>
@@ -5486,92 +5474,43 @@
             <p:ph type="body" idx="16" sz="quarter"/>
           </p:nvPr>
         </p:nvSpPr>
-        <p:spPr/>
+        <p:spPr>
+          <a:xfrm>
+            <a:off x="1073427" y="2077576"/>
+            <a:ext cx="10084904" cy="3507298"/>
+          </a:xfrm>
+        </p:spPr>
         <p:txBody>
           <a:bodyPr wrap="square"/>
           <a:lstStyle/>
           <a:p>
-            <a:pPr algn="l" marL="0" indent="-228600">
-              <a:buNone/>
-            </a:pPr>
-            <a:r>
-              <a:rPr sz="1900" b="0">
-                <a:solidFill>
-                  <a:srgbClr val="333844"/>
-                </a:solidFill>
-                <a:latin typeface="Calibri"/>
-              </a:rPr>
-              <a:t>▸  Patrones horarios: revelan timezone real independientemente de lo que declara el usuario</a:t>
-            </a:r>
-          </a:p>
-          <a:p>
-            <a:pPr algn="l" marL="0" indent="-228600">
-              <a:buNone/>
-            </a:pPr>
-            <a:r>
-              <a:rPr sz="1900" b="0">
-                <a:solidFill>
-                  <a:srgbClr val="333844"/>
-                </a:solidFill>
-                <a:latin typeface="Calibri"/>
-              </a:rPr>
-              <a:t>▸  Patrones semanales: diferencia profesionales (horario laboral) de aficionados</a:t>
-            </a:r>
-          </a:p>
-          <a:p>
-            <a:pPr algn="l" marL="0" indent="-228600">
-              <a:buNone/>
-            </a:pPr>
-            <a:r>
-              <a:rPr sz="1900" b="0">
-                <a:solidFill>
-                  <a:srgbClr val="333844"/>
-                </a:solidFill>
-                <a:latin typeface="Calibri"/>
-              </a:rPr>
-              <a:t>▸  Evolución anual: ciclo de vida del foro — crecimiento, madurez, declive tras arrests</a:t>
-            </a:r>
-          </a:p>
-          <a:p>
-            <a:pPr algn="l" marL="0" indent="-228600">
-              <a:buNone/>
-            </a:pPr>
-            <a:r>
-              <a:rPr sz="1900" b="0">
-                <a:solidFill>
-                  <a:srgbClr val="333844"/>
-                </a:solidFill>
-                <a:latin typeface="Calibri"/>
-              </a:rPr>
-              <a:t>▸  Detección de spikes: z-score sobre series temporales (umbral: µ + 2σ)</a:t>
-            </a:r>
-          </a:p>
-          <a:p>
-            <a:pPr algn="l" marL="0" indent="-228600">
-              <a:buNone/>
-            </a:pPr>
-            <a:r>
-              <a:rPr sz="1900" b="0">
-                <a:solidFill>
-                  <a:srgbClr val="333844"/>
-                </a:solidFill>
-                <a:latin typeface="Calibri"/>
-              </a:rPr>
-              <a:t>▸  Correlación con eventos externos: arrestos, operaciones policiales, filtraciones competidoras</a:t>
-            </a:r>
-          </a:p>
-          <a:p>
-            <a:pPr algn="l" marL="0" indent="-228600">
-              <a:buNone/>
-            </a:pPr>
-            <a:r>
-              <a:rPr sz="1900" b="0">
-                <a:solidFill>
-                  <a:srgbClr val="333844"/>
-                </a:solidFill>
-                <a:latin typeface="Calibri"/>
-              </a:rPr>
-              <a:t>▸  El cuándo a veces importa tanto como el qué</a:t>
+            <a:r>
+              <a:t>Patrones horarios: revelan timezone real independientemente de lo que declara el usuario</a:t>
+            </a:r>
+          </a:p>
+          <a:p>
+            <a:r>
+              <a:t>Patrones semanales: diferencia profesionales (horario laboral) de aficionados</a:t>
+            </a:r>
+          </a:p>
+          <a:p>
+            <a:r>
+              <a:t>Evolución anual: ciclo de vida del foro — crecimiento, madurez, declive tras arrests</a:t>
+            </a:r>
+          </a:p>
+          <a:p>
+            <a:r>
+              <a:t>Detección de spikes: z-score sobre series temporales (umbral: µ + 2σ)</a:t>
+            </a:r>
+          </a:p>
+          <a:p>
+            <a:r>
+              <a:t>Correlación con eventos externos: arrestos, operaciones policiales, filtraciones competidoras</a:t>
+            </a:r>
+          </a:p>
+          <a:p>
+            <a:r>
+              <a:t>El cuándo a veces importa tanto como el qué</a:t>
             </a:r>
           </a:p>
         </p:txBody>
@@ -5610,12 +5549,6 @@
           <a:lstStyle/>
           <a:p>
             <a:r>
-              <a:rPr sz="2400" b="1">
-                <a:solidFill>
-                  <a:srgbClr val="1A1A2E"/>
-                </a:solidFill>
-                <a:latin typeface="Calibri"/>
-              </a:rPr>
               <a:t>Text mining clásico — rápido y sin GPU</a:t>
             </a:r>
           </a:p>
@@ -5631,92 +5564,43 @@
             <p:ph type="body" idx="16" sz="quarter"/>
           </p:nvPr>
         </p:nvSpPr>
-        <p:spPr/>
+        <p:spPr>
+          <a:xfrm>
+            <a:off x="1073427" y="2077576"/>
+            <a:ext cx="10084904" cy="3507298"/>
+          </a:xfrm>
+        </p:spPr>
         <p:txBody>
           <a:bodyPr wrap="square"/>
           <a:lstStyle/>
           <a:p>
-            <a:pPr algn="l" marL="0" indent="-228600">
-              <a:buNone/>
-            </a:pPr>
-            <a:r>
-              <a:rPr sz="1900" b="0">
-                <a:solidFill>
-                  <a:srgbClr val="333844"/>
-                </a:solidFill>
-                <a:latin typeface="Calibri"/>
-              </a:rPr>
-              <a:t>▸  TF-IDF: términos más discriminantes por foro, por período, por subgrupo</a:t>
-            </a:r>
-          </a:p>
-          <a:p>
-            <a:pPr algn="l" marL="0" indent="-228600">
-              <a:buNone/>
-            </a:pPr>
-            <a:r>
-              <a:rPr sz="1900" b="0">
-                <a:solidFill>
-                  <a:srgbClr val="333844"/>
-                </a:solidFill>
-                <a:latin typeface="Calibri"/>
-              </a:rPr>
-              <a:t>▸  LDA (Latent Dirichlet Allocation): topic modeling sin etiquetar nada manualmente</a:t>
-            </a:r>
-          </a:p>
-          <a:p>
-            <a:pPr algn="l" marL="0" indent="-228600">
-              <a:buNone/>
-            </a:pPr>
-            <a:r>
-              <a:rPr sz="1900" b="0">
-                <a:solidFill>
-                  <a:srgbClr val="333844"/>
-                </a:solidFill>
-                <a:latin typeface="Calibri"/>
-              </a:rPr>
-              <a:t>▸  Sin GPU, sin modelos grandes — estadística pura sobre frecuencias de tokens</a:t>
-            </a:r>
-          </a:p>
-          <a:p>
-            <a:pPr algn="l" marL="0" indent="-228600">
-              <a:buNone/>
-            </a:pPr>
-            <a:r>
-              <a:rPr sz="1900" b="0">
-                <a:solidFill>
-                  <a:srgbClr val="333844"/>
-                </a:solidFill>
-                <a:latin typeface="Calibri"/>
-              </a:rPr>
-              <a:t>▸  Funciona bien incluso con texto ruidoso, slang y abreviaciones</a:t>
-            </a:r>
-          </a:p>
-          <a:p>
-            <a:pPr algn="l" marL="0" indent="-228600">
-              <a:buNone/>
-            </a:pPr>
-            <a:r>
-              <a:rPr sz="1900" b="0">
-                <a:solidFill>
-                  <a:srgbClr val="333844"/>
-                </a:solidFill>
-                <a:latin typeface="Calibri"/>
-              </a:rPr>
-              <a:t>▸  Limitación crítica: requiere que stopwords y tokenización soporten el idioma del texto</a:t>
-            </a:r>
-          </a:p>
-          <a:p>
-            <a:pPr algn="l" marL="0" indent="-228600">
-              <a:buNone/>
-            </a:pPr>
-            <a:r>
-              <a:rPr sz="1900" b="0">
-                <a:solidFill>
-                  <a:srgbClr val="333844"/>
-                </a:solidFill>
-                <a:latin typeface="Calibri"/>
-              </a:rPr>
-              <a:t>▸  Texto en ruso con pipeline inglés → las stopwords no se eliminan → resultado basura</a:t>
+            <a:r>
+              <a:t>TF-IDF: términos más discriminantes por foro, por período, por subgrupo</a:t>
+            </a:r>
+          </a:p>
+          <a:p>
+            <a:r>
+              <a:t>LDA (Latent Dirichlet Allocation): topic modeling sin etiquetar nada manualmente</a:t>
+            </a:r>
+          </a:p>
+          <a:p>
+            <a:r>
+              <a:t>Sin GPU, sin modelos grandes — estadística pura sobre frecuencias de tokens</a:t>
+            </a:r>
+          </a:p>
+          <a:p>
+            <a:r>
+              <a:t>Funciona bien incluso con texto ruidoso, slang y abreviaciones</a:t>
+            </a:r>
+          </a:p>
+          <a:p>
+            <a:r>
+              <a:t>Limitación crítica: requiere que stopwords y tokenización soporten el idioma del texto</a:t>
+            </a:r>
+          </a:p>
+          <a:p>
+            <a:r>
+              <a:t>Texto en ruso con pipeline inglés → las stopwords no se eliminan → resultado basura</a:t>
             </a:r>
           </a:p>
         </p:txBody>
@@ -5755,12 +5639,6 @@
           <a:lstStyle/>
           <a:p>
             <a:r>
-              <a:rPr sz="2400" b="1">
-                <a:solidFill>
-                  <a:srgbClr val="1A1A2E"/>
-                </a:solidFill>
-                <a:latin typeface="Calibri"/>
-              </a:rPr>
               <a:t>Idioma original vs. traducción — cuándo importa en Big Data</a:t>
             </a:r>
           </a:p>
@@ -5791,14 +5669,14 @@
         </p:nvSpPr>
         <p:spPr>
           <a:xfrm>
-            <a:off x="1051560" y="1645920"/>
+            <a:off x="1051560" y="2651760"/>
             <a:ext cx="10058400" cy="365760"/>
           </a:xfrm>
           <a:prstGeom prst="rect">
             <a:avLst/>
           </a:prstGeom>
           <a:solidFill>
-            <a:srgbClr val="E32B3D"/>
+            <a:srgbClr val="CD2D37"/>
           </a:solidFill>
           <a:ln>
             <a:noFill/>
@@ -5834,7 +5712,7 @@
         </p:nvSpPr>
         <p:spPr>
           <a:xfrm>
-            <a:off x="1097280" y="1700920"/>
+            <a:off x="1097280" y="2706760"/>
             <a:ext cx="2423160" cy="365760"/>
           </a:xfrm>
           <a:prstGeom prst="rect">
@@ -5854,7 +5732,7 @@
                 <a:solidFill>
                   <a:srgbClr val="FFFFFF"/>
                 </a:solidFill>
-                <a:latin typeface="Calibri"/>
+                <a:latin typeface="Arial"/>
               </a:rPr>
               <a:t>Técnica</a:t>
             </a:r>
@@ -5869,7 +5747,7 @@
         </p:nvSpPr>
         <p:spPr>
           <a:xfrm>
-            <a:off x="3611880" y="1700920"/>
+            <a:off x="3611880" y="2706760"/>
             <a:ext cx="2423160" cy="365760"/>
           </a:xfrm>
           <a:prstGeom prst="rect">
@@ -5889,7 +5767,7 @@
                 <a:solidFill>
                   <a:srgbClr val="FFFFFF"/>
                 </a:solidFill>
-                <a:latin typeface="Calibri"/>
+                <a:latin typeface="Arial"/>
               </a:rPr>
               <a:t>Original</a:t>
             </a:r>
@@ -5904,7 +5782,7 @@
         </p:nvSpPr>
         <p:spPr>
           <a:xfrm>
-            <a:off x="6126480" y="1700920"/>
+            <a:off x="6126480" y="2706760"/>
             <a:ext cx="2423160" cy="365760"/>
           </a:xfrm>
           <a:prstGeom prst="rect">
@@ -5924,7 +5802,7 @@
                 <a:solidFill>
                   <a:srgbClr val="FFFFFF"/>
                 </a:solidFill>
-                <a:latin typeface="Calibri"/>
+                <a:latin typeface="Arial"/>
               </a:rPr>
               <a:t>Traducción</a:t>
             </a:r>
@@ -5939,7 +5817,7 @@
         </p:nvSpPr>
         <p:spPr>
           <a:xfrm>
-            <a:off x="8641080" y="1700920"/>
+            <a:off x="8641080" y="2706760"/>
             <a:ext cx="2423160" cy="365760"/>
           </a:xfrm>
           <a:prstGeom prst="rect">
@@ -5959,7 +5837,7 @@
                 <a:solidFill>
                   <a:srgbClr val="FFFFFF"/>
                 </a:solidFill>
-                <a:latin typeface="Calibri"/>
+                <a:latin typeface="Arial"/>
               </a:rPr>
               <a:t>Por qué</a:t>
             </a:r>
@@ -5974,7 +5852,7 @@
         </p:nvSpPr>
         <p:spPr>
           <a:xfrm>
-            <a:off x="1051560" y="2011680"/>
+            <a:off x="1051560" y="3017520"/>
             <a:ext cx="10058400" cy="615315"/>
           </a:xfrm>
           <a:prstGeom prst="rect">
@@ -6017,7 +5895,7 @@
         </p:nvSpPr>
         <p:spPr>
           <a:xfrm>
-            <a:off x="1097280" y="2051680"/>
+            <a:off x="1097280" y="3057520"/>
             <a:ext cx="2423160" cy="615315"/>
           </a:xfrm>
           <a:prstGeom prst="rect">
@@ -6035,9 +5913,9 @@
             <a:r>
               <a:rPr sz="1100" b="0">
                 <a:solidFill>
-                  <a:srgbClr val="333844"/>
+                  <a:srgbClr val="465461"/>
                 </a:solidFill>
-                <a:latin typeface="Calibri"/>
+                <a:latin typeface="Arial"/>
               </a:rPr>
               <a:t>TF-IDF</a:t>
             </a:r>
@@ -6052,7 +5930,7 @@
         </p:nvSpPr>
         <p:spPr>
           <a:xfrm>
-            <a:off x="3611880" y="2051680"/>
+            <a:off x="3611880" y="3057520"/>
             <a:ext cx="2423160" cy="615315"/>
           </a:xfrm>
           <a:prstGeom prst="rect">
@@ -6070,9 +5948,9 @@
             <a:r>
               <a:rPr sz="1100" b="0">
                 <a:solidFill>
-                  <a:srgbClr val="333844"/>
+                  <a:srgbClr val="465461"/>
                 </a:solidFill>
-                <a:latin typeface="Calibri"/>
+                <a:latin typeface="Arial"/>
               </a:rPr>
               <a:t>✓ si hay stopwords del idioma</a:t>
             </a:r>
@@ -6087,7 +5965,7 @@
         </p:nvSpPr>
         <p:spPr>
           <a:xfrm>
-            <a:off x="6126480" y="2051680"/>
+            <a:off x="6126480" y="3057520"/>
             <a:ext cx="2423160" cy="615315"/>
           </a:xfrm>
           <a:prstGeom prst="rect">
@@ -6105,9 +5983,9 @@
             <a:r>
               <a:rPr sz="1100" b="0">
                 <a:solidFill>
-                  <a:srgbClr val="333844"/>
+                  <a:srgbClr val="465461"/>
                 </a:solidFill>
-                <a:latin typeface="Calibri"/>
+                <a:latin typeface="Arial"/>
               </a:rPr>
               <a:t>✓ si no hay</a:t>
             </a:r>
@@ -6122,7 +6000,7 @@
         </p:nvSpPr>
         <p:spPr>
           <a:xfrm>
-            <a:off x="8641080" y="2051680"/>
+            <a:off x="8641080" y="3057520"/>
             <a:ext cx="2423160" cy="615315"/>
           </a:xfrm>
           <a:prstGeom prst="rect">
@@ -6140,9 +6018,9 @@
             <a:r>
               <a:rPr sz="1100" b="0">
                 <a:solidFill>
-                  <a:srgbClr val="333844"/>
+                  <a:srgbClr val="465461"/>
                 </a:solidFill>
-                <a:latin typeface="Calibri"/>
+                <a:latin typeface="Arial"/>
               </a:rPr>
               <a:t>Las stopwords en inglés no eliminan preposiciones rusas</a:t>
             </a:r>
@@ -6157,7 +6035,7 @@
         </p:nvSpPr>
         <p:spPr>
           <a:xfrm>
-            <a:off x="1051560" y="2626995"/>
+            <a:off x="1051560" y="3632835"/>
             <a:ext cx="10058400" cy="440689"/>
           </a:xfrm>
           <a:prstGeom prst="rect">
@@ -6200,7 +6078,7 @@
         </p:nvSpPr>
         <p:spPr>
           <a:xfrm>
-            <a:off x="1097280" y="2666995"/>
+            <a:off x="1097280" y="3672835"/>
             <a:ext cx="2423160" cy="440689"/>
           </a:xfrm>
           <a:prstGeom prst="rect">
@@ -6218,9 +6096,9 @@
             <a:r>
               <a:rPr sz="1100" b="0">
                 <a:solidFill>
-                  <a:srgbClr val="333844"/>
+                  <a:srgbClr val="465461"/>
                 </a:solidFill>
-                <a:latin typeface="Calibri"/>
+                <a:latin typeface="Arial"/>
               </a:rPr>
               <a:t>LDA</a:t>
             </a:r>
@@ -6235,7 +6113,7 @@
         </p:nvSpPr>
         <p:spPr>
           <a:xfrm>
-            <a:off x="3611880" y="2666995"/>
+            <a:off x="3611880" y="3672835"/>
             <a:ext cx="2423160" cy="440689"/>
           </a:xfrm>
           <a:prstGeom prst="rect">
@@ -6253,9 +6131,9 @@
             <a:r>
               <a:rPr sz="1100" b="0">
                 <a:solidFill>
-                  <a:srgbClr val="333844"/>
+                  <a:srgbClr val="465461"/>
                 </a:solidFill>
-                <a:latin typeface="Calibri"/>
+                <a:latin typeface="Arial"/>
               </a:rPr>
               <a:t>✓ con tokenización correcta</a:t>
             </a:r>
@@ -6270,7 +6148,7 @@
         </p:nvSpPr>
         <p:spPr>
           <a:xfrm>
-            <a:off x="6126480" y="2666995"/>
+            <a:off x="6126480" y="3672835"/>
             <a:ext cx="2423160" cy="440689"/>
           </a:xfrm>
           <a:prstGeom prst="rect">
@@ -6288,9 +6166,9 @@
             <a:r>
               <a:rPr sz="1100" b="0">
                 <a:solidFill>
-                  <a:srgbClr val="333844"/>
+                  <a:srgbClr val="465461"/>
                 </a:solidFill>
-                <a:latin typeface="Calibri"/>
+                <a:latin typeface="Arial"/>
               </a:rPr>
               <a:t>Aceptable</a:t>
             </a:r>
@@ -6305,7 +6183,7 @@
         </p:nvSpPr>
         <p:spPr>
           <a:xfrm>
-            <a:off x="8641080" y="2666995"/>
+            <a:off x="8641080" y="3672835"/>
             <a:ext cx="2423160" cy="440689"/>
           </a:xfrm>
           <a:prstGeom prst="rect">
@@ -6323,9 +6201,9 @@
             <a:r>
               <a:rPr sz="1100" b="0">
                 <a:solidFill>
-                  <a:srgbClr val="333844"/>
+                  <a:srgbClr val="465461"/>
                 </a:solidFill>
-                <a:latin typeface="Calibri"/>
+                <a:latin typeface="Arial"/>
               </a:rPr>
               <a:t>Sin tokenizador multilingüe, los topics son ruido</a:t>
             </a:r>
@@ -6340,7 +6218,7 @@
         </p:nvSpPr>
         <p:spPr>
           <a:xfrm>
-            <a:off x="1051560" y="3067685"/>
+            <a:off x="1051560" y="4073525"/>
             <a:ext cx="10058400" cy="440689"/>
           </a:xfrm>
           <a:prstGeom prst="rect">
@@ -6383,7 +6261,7 @@
         </p:nvSpPr>
         <p:spPr>
           <a:xfrm>
-            <a:off x="1097280" y="3107685"/>
+            <a:off x="1097280" y="4113525"/>
             <a:ext cx="2423160" cy="440689"/>
           </a:xfrm>
           <a:prstGeom prst="rect">
@@ -6401,9 +6279,9 @@
             <a:r>
               <a:rPr sz="1100" b="0">
                 <a:solidFill>
-                  <a:srgbClr val="333844"/>
+                  <a:srgbClr val="465461"/>
                 </a:solidFill>
-                <a:latin typeface="Calibri"/>
+                <a:latin typeface="Arial"/>
               </a:rPr>
               <a:t>Estadística</a:t>
             </a:r>
@@ -6418,7 +6296,7 @@
         </p:nvSpPr>
         <p:spPr>
           <a:xfrm>
-            <a:off x="3611880" y="3107685"/>
+            <a:off x="3611880" y="4113525"/>
             <a:ext cx="2423160" cy="440689"/>
           </a:xfrm>
           <a:prstGeom prst="rect">
@@ -6436,9 +6314,9 @@
             <a:r>
               <a:rPr sz="1100" b="0">
                 <a:solidFill>
-                  <a:srgbClr val="333844"/>
+                  <a:srgbClr val="465461"/>
                 </a:solidFill>
-                <a:latin typeface="Calibri"/>
+                <a:latin typeface="Arial"/>
               </a:rPr>
               <a:t>✓ siempre</a:t>
             </a:r>
@@ -6453,7 +6331,7 @@
         </p:nvSpPr>
         <p:spPr>
           <a:xfrm>
-            <a:off x="6126480" y="3107685"/>
+            <a:off x="6126480" y="4113525"/>
             <a:ext cx="2423160" cy="440689"/>
           </a:xfrm>
           <a:prstGeom prst="rect">
@@ -6471,9 +6349,9 @@
             <a:r>
               <a:rPr sz="1100" b="0">
                 <a:solidFill>
-                  <a:srgbClr val="333844"/>
+                  <a:srgbClr val="465461"/>
                 </a:solidFill>
-                <a:latin typeface="Calibri"/>
+                <a:latin typeface="Arial"/>
               </a:rPr>
               <a:t>No necesaria</a:t>
             </a:r>
@@ -6488,7 +6366,7 @@
         </p:nvSpPr>
         <p:spPr>
           <a:xfrm>
-            <a:off x="8641080" y="3107685"/>
+            <a:off x="8641080" y="4113525"/>
             <a:ext cx="2423160" cy="440689"/>
           </a:xfrm>
           <a:prstGeom prst="rect">
@@ -6506,9 +6384,9 @@
             <a:r>
               <a:rPr sz="1100" b="0">
                 <a:solidFill>
-                  <a:srgbClr val="333844"/>
+                  <a:srgbClr val="465461"/>
                 </a:solidFill>
-                <a:latin typeface="Calibri"/>
+                <a:latin typeface="Arial"/>
               </a:rPr>
               <a:t>Longitud, fechas, recuentos no dependen del idioma</a:t>
             </a:r>
@@ -6523,7 +6401,7 @@
         </p:nvSpPr>
         <p:spPr>
           <a:xfrm>
-            <a:off x="1051560" y="3508375"/>
+            <a:off x="1051560" y="4514215"/>
             <a:ext cx="10058400" cy="615315"/>
           </a:xfrm>
           <a:prstGeom prst="rect">
@@ -6566,7 +6444,7 @@
         </p:nvSpPr>
         <p:spPr>
           <a:xfrm>
-            <a:off x="1097280" y="3548375"/>
+            <a:off x="1097280" y="4554215"/>
             <a:ext cx="2423160" cy="615315"/>
           </a:xfrm>
           <a:prstGeom prst="rect">
@@ -6584,9 +6462,9 @@
             <a:r>
               <a:rPr sz="1100" b="0">
                 <a:solidFill>
-                  <a:srgbClr val="333844"/>
+                  <a:srgbClr val="465461"/>
                 </a:solidFill>
-                <a:latin typeface="Calibri"/>
+                <a:latin typeface="Arial"/>
               </a:rPr>
               <a:t>Red social</a:t>
             </a:r>
@@ -6601,7 +6479,7 @@
         </p:nvSpPr>
         <p:spPr>
           <a:xfrm>
-            <a:off x="3611880" y="3548375"/>
+            <a:off x="3611880" y="4554215"/>
             <a:ext cx="2423160" cy="615315"/>
           </a:xfrm>
           <a:prstGeom prst="rect">
@@ -6619,9 +6497,9 @@
             <a:r>
               <a:rPr sz="1100" b="0">
                 <a:solidFill>
-                  <a:srgbClr val="333844"/>
+                  <a:srgbClr val="465461"/>
                 </a:solidFill>
-                <a:latin typeface="Calibri"/>
+                <a:latin typeface="Arial"/>
               </a:rPr>
               <a:t>✓ siempre</a:t>
             </a:r>
@@ -6636,7 +6514,7 @@
         </p:nvSpPr>
         <p:spPr>
           <a:xfrm>
-            <a:off x="6126480" y="3548375"/>
+            <a:off x="6126480" y="4554215"/>
             <a:ext cx="2423160" cy="615315"/>
           </a:xfrm>
           <a:prstGeom prst="rect">
@@ -6654,9 +6532,9 @@
             <a:r>
               <a:rPr sz="1100" b="0">
                 <a:solidFill>
-                  <a:srgbClr val="333844"/>
+                  <a:srgbClr val="465461"/>
                 </a:solidFill>
-                <a:latin typeface="Calibri"/>
+                <a:latin typeface="Arial"/>
               </a:rPr>
               <a:t>No necesaria</a:t>
             </a:r>
@@ -6671,7 +6549,7 @@
         </p:nvSpPr>
         <p:spPr>
           <a:xfrm>
-            <a:off x="8641080" y="3548375"/>
+            <a:off x="8641080" y="4554215"/>
             <a:ext cx="2423160" cy="615315"/>
           </a:xfrm>
           <a:prstGeom prst="rect">
@@ -6689,9 +6567,9 @@
             <a:r>
               <a:rPr sz="1100" b="0">
                 <a:solidFill>
-                  <a:srgbClr val="333844"/>
+                  <a:srgbClr val="465461"/>
                 </a:solidFill>
-                <a:latin typeface="Calibri"/>
+                <a:latin typeface="Arial"/>
               </a:rPr>
               <a:t>Las aristas del grafo son independientes del idioma</a:t>
             </a:r>
@@ -6731,34 +6609,31 @@
           <a:bodyPr wrap="square"/>
           <a:lstStyle/>
           <a:p>
+            <a:pPr algn="ctr"/>
             <a:r>
               <a:rPr sz="1300" b="1">
                 <a:solidFill>
-                  <a:srgbClr val="E32B3D"/>
+                  <a:srgbClr val="CD2D37"/>
                 </a:solidFill>
-                <a:latin typeface="Calibri"/>
+                <a:latin typeface="Arial"/>
               </a:rPr>
               <a:t>DEMO EN VIVO</a:t>
             </a:r>
           </a:p>
           <a:p>
-            <a:r>
-              <a:rPr sz="2600" b="1">
-                <a:solidFill>
-                  <a:srgbClr val="FFFFFF"/>
-                </a:solidFill>
-                <a:latin typeface="Calibri"/>
-              </a:rPr>
+            <a:pPr algn="ctr"/>
+            <a:r>
               <a:t>Demo — EDA y análisis de red</a:t>
             </a:r>
           </a:p>
           <a:p>
+            <a:pPr algn="ctr"/>
             <a:r>
               <a:rPr sz="1400">
                 <a:solidFill>
                   <a:srgbClr val="9AA3B5"/>
                 </a:solidFill>
-                <a:latin typeface="Calibri"/>
+                <a:latin typeface="Arial"/>
               </a:rPr>
               <a:t>CardingForums/01_carding_forums.ipynb</a:t>
             </a:r>
@@ -6792,7 +6667,7 @@
                 <a:solidFill>
                   <a:srgbClr val="D6DAE2"/>
                 </a:solidFill>
-                <a:latin typeface="Calibri"/>
+                <a:latin typeface="Arial"/>
               </a:rPr>
               <a:t>1.  Cargar dataset con load_forum() — auto-detección de formato</a:t>
             </a:r>
@@ -6803,7 +6678,7 @@
                 <a:solidFill>
                   <a:srgbClr val="D6DAE2"/>
                 </a:solidFill>
-                <a:latin typeface="Calibri"/>
+                <a:latin typeface="Arial"/>
               </a:rPr>
               <a:t>2.  Estadística descriptiva: distribución de usuarios, posts por fecha</a:t>
             </a:r>
@@ -6814,7 +6689,7 @@
                 <a:solidFill>
                   <a:srgbClr val="D6DAE2"/>
                 </a:solidFill>
-                <a:latin typeface="Calibri"/>
+                <a:latin typeface="Arial"/>
               </a:rPr>
               <a:t>3.  Construir grafo usuario↔usuario desde threads compartidos</a:t>
             </a:r>
@@ -6825,7 +6700,7 @@
                 <a:solidFill>
                   <a:srgbClr val="D6DAE2"/>
                 </a:solidFill>
-                <a:latin typeface="Calibri"/>
+                <a:latin typeface="Arial"/>
               </a:rPr>
               <a:t>4.  Calcular betweenness centrality → identificar brokers</a:t>
             </a:r>
@@ -6836,7 +6711,7 @@
                 <a:solidFill>
                   <a:srgbClr val="D6DAE2"/>
                 </a:solidFill>
-                <a:latin typeface="Calibri"/>
+                <a:latin typeface="Arial"/>
               </a:rPr>
               <a:t>5.  Visualización Plotly interactiva: top-N nodos por degree</a:t>
             </a:r>
@@ -6876,34 +6751,31 @@
           <a:bodyPr wrap="square"/>
           <a:lstStyle/>
           <a:p>
+            <a:pPr algn="ctr"/>
             <a:r>
               <a:rPr sz="1300" b="1">
                 <a:solidFill>
-                  <a:srgbClr val="E32B3D"/>
+                  <a:srgbClr val="CD2D37"/>
                 </a:solidFill>
-                <a:latin typeface="Calibri"/>
+                <a:latin typeface="Arial"/>
               </a:rPr>
               <a:t>SECCIÓN 1</a:t>
             </a:r>
           </a:p>
           <a:p>
-            <a:r>
-              <a:rPr sz="3000" b="1">
-                <a:solidFill>
-                  <a:srgbClr val="FFFFFF"/>
-                </a:solidFill>
-                <a:latin typeface="Calibri"/>
-              </a:rPr>
+            <a:pPr algn="ctr"/>
+            <a:r>
               <a:t>El problema de escala</a:t>
             </a:r>
           </a:p>
           <a:p>
+            <a:pPr algn="ctr"/>
             <a:r>
               <a:rPr sz="1600">
                 <a:solidFill>
                   <a:srgbClr val="D6DAE2"/>
                 </a:solidFill>
-                <a:latin typeface="Calibri"/>
+                <a:latin typeface="Arial"/>
               </a:rPr>
               <a:t>Datos sucios en volúmenes moderados</a:t>
             </a:r>
@@ -6944,12 +6816,6 @@
           <a:lstStyle/>
           <a:p>
             <a:r>
-              <a:rPr sz="2400" b="1">
-                <a:solidFill>
-                  <a:srgbClr val="1A1A2E"/>
-                </a:solidFill>
-                <a:latin typeface="Calibri"/>
-              </a:rPr>
               <a:t>¿Qué significa 'big data' en este contexto?</a:t>
             </a:r>
           </a:p>
@@ -6965,92 +6831,43 @@
             <p:ph type="body" idx="16" sz="quarter"/>
           </p:nvPr>
         </p:nvSpPr>
-        <p:spPr/>
+        <p:spPr>
+          <a:xfrm>
+            <a:off x="1073427" y="2077576"/>
+            <a:ext cx="10084904" cy="3507298"/>
+          </a:xfrm>
+        </p:spPr>
         <p:txBody>
           <a:bodyPr wrap="square"/>
           <a:lstStyle/>
           <a:p>
-            <a:pPr algn="l" marL="0" indent="-228600">
-              <a:buNone/>
-            </a:pPr>
-            <a:r>
-              <a:rPr sz="1900" b="0">
-                <a:solidFill>
-                  <a:srgbClr val="333844"/>
-                </a:solidFill>
-                <a:latin typeface="Calibri"/>
-              </a:rPr>
-              <a:t>▸  No estamos en Hadoop: millones de registros, no billones</a:t>
-            </a:r>
-          </a:p>
-          <a:p>
-            <a:pPr algn="l" marL="0" indent="-228600">
-              <a:buNone/>
-            </a:pPr>
-            <a:r>
-              <a:rPr sz="1900" b="0">
-                <a:solidFill>
-                  <a:srgbClr val="333844"/>
-                </a:solidFill>
-                <a:latin typeface="Calibri"/>
-              </a:rPr>
-              <a:t>▸  El problema real: datos sucios, schemas inconsistentes, duplicados, texto multilingüe</a:t>
-            </a:r>
-          </a:p>
-          <a:p>
-            <a:pPr algn="l" marL="0" indent="-228600">
-              <a:buNone/>
-            </a:pPr>
-            <a:r>
-              <a:rPr sz="1900" b="0">
-                <a:solidFill>
-                  <a:srgbClr val="333844"/>
-                </a:solidFill>
-                <a:latin typeface="Calibri"/>
-              </a:rPr>
-              <a:t>▸  Primero explorar, luego analizar — no al revés</a:t>
-            </a:r>
-          </a:p>
-          <a:p>
-            <a:pPr algn="l" marL="0" indent="-228600">
-              <a:buNone/>
-            </a:pPr>
-            <a:r>
-              <a:rPr sz="1900" b="0">
-                <a:solidFill>
-                  <a:srgbClr val="333844"/>
-                </a:solidFill>
-                <a:latin typeface="Calibri"/>
-              </a:rPr>
-              <a:t>▸  La curva power-law es universal en foros: el 1% de usuarios genera el 80% del contenido</a:t>
-            </a:r>
-          </a:p>
-          <a:p>
-            <a:pPr algn="l" marL="0" indent="-228600">
-              <a:buNone/>
-            </a:pPr>
-            <a:r>
-              <a:rPr sz="1900" b="0">
-                <a:solidFill>
-                  <a:srgbClr val="333844"/>
-                </a:solidFill>
-                <a:latin typeface="Calibri"/>
-              </a:rPr>
-              <a:t>▸  Un usuario con 1 post puede ser más relevante que uno con 10.000 si el post es crítico</a:t>
-            </a:r>
-          </a:p>
-          <a:p>
-            <a:pPr algn="l" marL="0" indent="-228600">
-              <a:buNone/>
-            </a:pPr>
-            <a:r>
-              <a:rPr sz="1900" b="0">
-                <a:solidFill>
-                  <a:srgbClr val="333844"/>
-                </a:solidFill>
-                <a:latin typeface="Calibri"/>
-              </a:rPr>
-              <a:t>▸  Regla de oro: entender la forma del dataset antes de aplicar cualquier modelo</a:t>
+            <a:r>
+              <a:t>No estamos en Hadoop: millones de registros, no billones</a:t>
+            </a:r>
+          </a:p>
+          <a:p>
+            <a:r>
+              <a:t>El problema real: datos sucios, schemas inconsistentes, duplicados, texto multilingüe</a:t>
+            </a:r>
+          </a:p>
+          <a:p>
+            <a:r>
+              <a:t>Primero explorar, luego analizar — no al revés</a:t>
+            </a:r>
+          </a:p>
+          <a:p>
+            <a:r>
+              <a:t>La curva power-law es universal en foros: el 1% de usuarios genera el 80% del contenido</a:t>
+            </a:r>
+          </a:p>
+          <a:p>
+            <a:r>
+              <a:t>Un usuario con 1 post puede ser más relevante que uno con 10.000 si el post es crítico</a:t>
+            </a:r>
+          </a:p>
+          <a:p>
+            <a:r>
+              <a:t>Regla de oro: entender la forma del dataset antes de aplicar cualquier modelo</a:t>
             </a:r>
           </a:p>
         </p:txBody>
@@ -7089,12 +6906,6 @@
           <a:lstStyle/>
           <a:p>
             <a:r>
-              <a:rPr sz="2400" b="1">
-                <a:solidFill>
-                  <a:srgbClr val="1A1A2E"/>
-                </a:solidFill>
-                <a:latin typeface="Calibri"/>
-              </a:rPr>
               <a:t>Estadística descriptiva — métricas básicas obligatorias</a:t>
             </a:r>
           </a:p>
@@ -7110,92 +6921,43 @@
             <p:ph type="body" idx="16" sz="quarter"/>
           </p:nvPr>
         </p:nvSpPr>
-        <p:spPr/>
+        <p:spPr>
+          <a:xfrm>
+            <a:off x="1073427" y="2580496"/>
+            <a:ext cx="10084904" cy="3004378"/>
+          </a:xfrm>
+        </p:spPr>
         <p:txBody>
           <a:bodyPr wrap="square"/>
           <a:lstStyle/>
           <a:p>
-            <a:pPr algn="l" marL="0" indent="-228600">
-              <a:buNone/>
-            </a:pPr>
-            <a:r>
-              <a:rPr sz="1900" b="0">
-                <a:solidFill>
-                  <a:srgbClr val="333844"/>
-                </a:solidFill>
-                <a:latin typeface="Calibri"/>
-              </a:rPr>
-              <a:t>▸  Distribución de usuarios por actividad: siempre power-law, siempre asimétrica</a:t>
-            </a:r>
-          </a:p>
-          <a:p>
-            <a:pPr algn="l" marL="0" indent="-228600">
-              <a:buNone/>
-            </a:pPr>
-            <a:r>
-              <a:rPr sz="1900" b="0">
-                <a:solidFill>
-                  <a:srgbClr val="333844"/>
-                </a:solidFill>
-                <a:latin typeface="Calibri"/>
-              </a:rPr>
-              <a:t>▸  Evolución temporal: cuándo creció el foro, cuándo murió, qué eventos marcaron inflexiones</a:t>
-            </a:r>
-          </a:p>
-          <a:p>
-            <a:pPr algn="l" marL="0" indent="-228600">
-              <a:buNone/>
-            </a:pPr>
-            <a:r>
-              <a:rPr sz="1900" b="0">
-                <a:solidFill>
-                  <a:srgbClr val="333844"/>
-                </a:solidFill>
-                <a:latin typeface="Calibri"/>
-              </a:rPr>
-              <a:t>▸  Distribución geográfica: inferida por timezone de los timestamps (no por lo que declara el usuario)</a:t>
-            </a:r>
-          </a:p>
-          <a:p>
-            <a:pPr algn="l" marL="0" indent="-228600">
-              <a:buNone/>
-            </a:pPr>
-            <a:r>
-              <a:rPr sz="1900" b="0">
-                <a:solidFill>
-                  <a:srgbClr val="333844"/>
-                </a:solidFill>
-                <a:latin typeface="Calibri"/>
-              </a:rPr>
-              <a:t>▸  Densidad de contenido: ratio posts/usuario, longitud media, varianza</a:t>
-            </a:r>
-          </a:p>
-          <a:p>
-            <a:pPr algn="l" marL="0" indent="-228600">
-              <a:buNone/>
-            </a:pPr>
-            <a:r>
-              <a:rPr sz="1900" b="0">
-                <a:solidFill>
-                  <a:srgbClr val="333844"/>
-                </a:solidFill>
-                <a:latin typeface="Calibri"/>
-              </a:rPr>
-              <a:t>▸  Siempre validar rangos: timestamps en 1970 = epoch-0 corrupto, no datos de los 70</a:t>
-            </a:r>
-          </a:p>
-          <a:p>
-            <a:pPr algn="l" marL="0" indent="-228600">
-              <a:buNone/>
-            </a:pPr>
-            <a:r>
-              <a:rPr sz="1900" b="0">
-                <a:solidFill>
-                  <a:srgbClr val="333844"/>
-                </a:solidFill>
-                <a:latin typeface="Calibri"/>
-              </a:rPr>
-              <a:t>▸  Siempre validar recuentos: ¿cuántos usuarios esperabas? ¿cuántos cargaste?</a:t>
+            <a:r>
+              <a:t>Distribución de usuarios por actividad: siempre power-law, siempre asimétrica</a:t>
+            </a:r>
+          </a:p>
+          <a:p>
+            <a:r>
+              <a:t>Evolución temporal: cuándo creció el foro, cuándo murió, qué eventos marcaron inflexiones</a:t>
+            </a:r>
+          </a:p>
+          <a:p>
+            <a:r>
+              <a:t>Distribución geográfica: inferida por timezone de los timestamps (no por lo que declara el usuario)</a:t>
+            </a:r>
+          </a:p>
+          <a:p>
+            <a:r>
+              <a:t>Densidad de contenido: ratio posts/usuario, longitud media, varianza</a:t>
+            </a:r>
+          </a:p>
+          <a:p>
+            <a:r>
+              <a:t>Siempre validar rangos: timestamps en 1970 = epoch-0 corrupto, no datos de los 70</a:t>
+            </a:r>
+          </a:p>
+          <a:p>
+            <a:r>
+              <a:t>Siempre validar recuentos: ¿cuántos usuarios esperabas? ¿cuántos cargaste?</a:t>
             </a:r>
           </a:p>
         </p:txBody>
@@ -7233,34 +6995,31 @@
           <a:bodyPr wrap="square"/>
           <a:lstStyle/>
           <a:p>
+            <a:pPr algn="ctr"/>
             <a:r>
               <a:rPr sz="1300" b="1">
                 <a:solidFill>
-                  <a:srgbClr val="E32B3D"/>
+                  <a:srgbClr val="CD2D37"/>
                 </a:solidFill>
-                <a:latin typeface="Calibri"/>
+                <a:latin typeface="Arial"/>
               </a:rPr>
               <a:t>SECCIÓN 2</a:t>
             </a:r>
           </a:p>
           <a:p>
-            <a:r>
-              <a:rPr sz="3000" b="1">
-                <a:solidFill>
-                  <a:srgbClr val="FFFFFF"/>
-                </a:solidFill>
-                <a:latin typeface="Calibri"/>
-              </a:rPr>
+            <a:pPr algn="ctr"/>
+            <a:r>
               <a:t>Análisis de red social</a:t>
             </a:r>
           </a:p>
           <a:p>
+            <a:pPr algn="ctr"/>
             <a:r>
               <a:rPr sz="1600">
                 <a:solidFill>
                   <a:srgbClr val="D6DAE2"/>
                 </a:solidFill>
-                <a:latin typeface="Calibri"/>
+                <a:latin typeface="Arial"/>
               </a:rPr>
               <a:t>Los foros son grafos — úsalos como tales</a:t>
             </a:r>
@@ -7301,12 +7060,6 @@
           <a:lstStyle/>
           <a:p>
             <a:r>
-              <a:rPr sz="2400" b="1">
-                <a:solidFill>
-                  <a:srgbClr val="1A1A2E"/>
-                </a:solidFill>
-                <a:latin typeface="Calibri"/>
-              </a:rPr>
               <a:t>Grafos de interacción — la estructura oculta</a:t>
             </a:r>
           </a:p>
@@ -7322,92 +7075,43 @@
             <p:ph type="body" idx="16" sz="quarter"/>
           </p:nvPr>
         </p:nvSpPr>
-        <p:spPr/>
+        <p:spPr>
+          <a:xfrm>
+            <a:off x="1073427" y="2077576"/>
+            <a:ext cx="10084904" cy="3507298"/>
+          </a:xfrm>
+        </p:spPr>
         <p:txBody>
           <a:bodyPr wrap="square"/>
           <a:lstStyle/>
           <a:p>
-            <a:pPr algn="l" marL="0" indent="-228600">
-              <a:buNone/>
-            </a:pPr>
-            <a:r>
-              <a:rPr sz="1900" b="0">
-                <a:solidFill>
-                  <a:srgbClr val="333844"/>
-                </a:solidFill>
-                <a:latin typeface="Calibri"/>
-              </a:rPr>
-              <a:t>▸  Cada respuesta en un hilo es una arista dirigida entre dos usuarios</a:t>
-            </a:r>
-          </a:p>
-          <a:p>
-            <a:pPr algn="l" marL="0" indent="-228600">
-              <a:buNone/>
-            </a:pPr>
-            <a:r>
-              <a:rPr sz="1900" b="0">
-                <a:solidFill>
-                  <a:srgbClr val="333844"/>
-                </a:solidFill>
-                <a:latin typeface="Calibri"/>
-              </a:rPr>
-              <a:t>▸  Degree centrality: quién tiene más conexiones directas</a:t>
-            </a:r>
-          </a:p>
-          <a:p>
-            <a:pPr algn="l" marL="0" indent="-228600">
-              <a:buNone/>
-            </a:pPr>
-            <a:r>
-              <a:rPr sz="1900" b="0">
-                <a:solidFill>
-                  <a:srgbClr val="333844"/>
-                </a:solidFill>
-                <a:latin typeface="Calibri"/>
-              </a:rPr>
-              <a:t>▸  Betweenness centrality: quién actúa de puente entre subgrupos (los brokers)</a:t>
-            </a:r>
-          </a:p>
-          <a:p>
-            <a:pPr algn="l" marL="0" indent="-228600">
-              <a:buNone/>
-            </a:pPr>
-            <a:r>
-              <a:rPr sz="1900" b="0">
-                <a:solidFill>
-                  <a:srgbClr val="333844"/>
-                </a:solidFill>
-                <a:latin typeface="Calibri"/>
-              </a:rPr>
-              <a:t>▸  Algoritmos de detección de comunidades: Louvain sin necesidad de especificar K</a:t>
-            </a:r>
-          </a:p>
-          <a:p>
-            <a:pPr algn="l" marL="0" indent="-228600">
-              <a:buNone/>
-            </a:pPr>
-            <a:r>
-              <a:rPr sz="1900" b="0">
-                <a:solidFill>
-                  <a:srgbClr val="333844"/>
-                </a:solidFill>
-                <a:latin typeface="Calibri"/>
-              </a:rPr>
-              <a:t>▸  NetworkX + Plotly para visualización interactiva sin servidor externo</a:t>
-            </a:r>
-          </a:p>
-          <a:p>
-            <a:pPr algn="l" marL="0" indent="-228600">
-              <a:buNone/>
-            </a:pPr>
-            <a:r>
-              <a:rPr sz="1900" b="0">
-                <a:solidFill>
-                  <a:srgbClr val="333844"/>
-                </a:solidFill>
-                <a:latin typeface="Calibri"/>
-              </a:rPr>
-              <a:t>▸  Limitación práctica: muestra de 5.000 threads para grafos manejables en RAM</a:t>
+            <a:r>
+              <a:t>Cada respuesta en un hilo es una arista dirigida entre dos usuarios</a:t>
+            </a:r>
+          </a:p>
+          <a:p>
+            <a:r>
+              <a:t>Degree centrality: quién tiene más conexiones directas</a:t>
+            </a:r>
+          </a:p>
+          <a:p>
+            <a:r>
+              <a:t>Betweenness centrality: quién actúa de puente entre subgrupos (los brokers)</a:t>
+            </a:r>
+          </a:p>
+          <a:p>
+            <a:r>
+              <a:t>Algoritmos de detección de comunidades: Louvain sin necesidad de especificar K</a:t>
+            </a:r>
+          </a:p>
+          <a:p>
+            <a:r>
+              <a:t>NetworkX + Plotly para visualización interactiva sin servidor externo</a:t>
+            </a:r>
+          </a:p>
+          <a:p>
+            <a:r>
+              <a:t>Limitación práctica: muestra de 5.000 threads para grafos manejables en RAM</a:t>
             </a:r>
           </a:p>
         </p:txBody>
@@ -7446,12 +7150,6 @@
           <a:lstStyle/>
           <a:p>
             <a:r>
-              <a:rPr sz="2400" b="1">
-                <a:solidFill>
-                  <a:srgbClr val="1A1A2E"/>
-                </a:solidFill>
-                <a:latin typeface="Calibri"/>
-              </a:rPr>
               <a:t>Dos tipos de red en un mismo foro</a:t>
             </a:r>
           </a:p>
@@ -7482,7 +7180,7 @@
         </p:nvSpPr>
         <p:spPr>
           <a:xfrm>
-            <a:off x="1051560" y="1691640"/>
+            <a:off x="1051560" y="2194560"/>
             <a:ext cx="4846320" cy="411480"/>
           </a:xfrm>
           <a:prstGeom prst="rect">
@@ -7500,9 +7198,9 @@
             <a:r>
               <a:rPr sz="1600" b="1">
                 <a:solidFill>
-                  <a:srgbClr val="E32B3D"/>
+                  <a:srgbClr val="CD2D37"/>
                 </a:solidFill>
-                <a:latin typeface="Calibri"/>
+                <a:latin typeface="Arial"/>
               </a:rPr>
               <a:t>Red pública (hilos y posts)</a:t>
             </a:r>
@@ -7517,8 +7215,8 @@
         </p:nvSpPr>
         <p:spPr>
           <a:xfrm>
-            <a:off x="1051560" y="2148840"/>
-            <a:ext cx="4846320" cy="3840480"/>
+            <a:off x="1051560" y="2651760"/>
+            <a:ext cx="4846320" cy="3337560"/>
           </a:xfrm>
           <a:prstGeom prst="rect">
             <a:avLst/>
@@ -7534,9 +7232,9 @@
             <a:r>
               <a:rPr sz="1600">
                 <a:solidFill>
-                  <a:srgbClr val="333844"/>
+                  <a:srgbClr val="465461"/>
                 </a:solidFill>
-                <a:latin typeface="Calibri"/>
+                <a:latin typeface="Arial"/>
               </a:rPr>
               <a:t>▸  Aristas visibles a todos los miembros</a:t>
             </a:r>
@@ -7545,9 +7243,9 @@
             <a:r>
               <a:rPr sz="1600">
                 <a:solidFill>
-                  <a:srgbClr val="333844"/>
+                  <a:srgbClr val="465461"/>
                 </a:solidFill>
-                <a:latin typeface="Calibri"/>
+                <a:latin typeface="Arial"/>
               </a:rPr>
               <a:t>▸  Refleja influencia pública y reputación</a:t>
             </a:r>
@@ -7556,9 +7254,9 @@
             <a:r>
               <a:rPr sz="1600">
                 <a:solidFill>
-                  <a:srgbClr val="333844"/>
+                  <a:srgbClr val="465461"/>
                 </a:solidFill>
-                <a:latin typeface="Calibri"/>
+                <a:latin typeface="Arial"/>
               </a:rPr>
               <a:t>▸  Broker: el usuario más citado/respondido</a:t>
             </a:r>
@@ -7567,9 +7265,9 @@
             <a:r>
               <a:rPr sz="1600">
                 <a:solidFill>
-                  <a:srgbClr val="333844"/>
+                  <a:srgbClr val="465461"/>
                 </a:solidFill>
-                <a:latin typeface="Calibri"/>
+                <a:latin typeface="Arial"/>
               </a:rPr>
               <a:t>▸  Sesgada hacia los usuarios más activos</a:t>
             </a:r>
@@ -7584,7 +7282,7 @@
         </p:nvSpPr>
         <p:spPr>
           <a:xfrm>
-            <a:off x="6217920" y="1691640"/>
+            <a:off x="6217920" y="2194560"/>
             <a:ext cx="4846320" cy="411480"/>
           </a:xfrm>
           <a:prstGeom prst="rect">
@@ -7602,9 +7300,9 @@
             <a:r>
               <a:rPr sz="1600" b="1">
                 <a:solidFill>
-                  <a:srgbClr val="E32B3D"/>
+                  <a:srgbClr val="CD2D37"/>
                 </a:solidFill>
-                <a:latin typeface="Calibri"/>
+                <a:latin typeface="Arial"/>
               </a:rPr>
               <a:t>Red privada (mensajes privados)</a:t>
             </a:r>
@@ -7619,8 +7317,8 @@
         </p:nvSpPr>
         <p:spPr>
           <a:xfrm>
-            <a:off x="6217920" y="2148840"/>
-            <a:ext cx="4846320" cy="3840480"/>
+            <a:off x="6217920" y="2651760"/>
+            <a:ext cx="4846320" cy="3337560"/>
           </a:xfrm>
           <a:prstGeom prst="rect">
             <a:avLst/>
@@ -7636,9 +7334,9 @@
             <a:r>
               <a:rPr sz="1600">
                 <a:solidFill>
-                  <a:srgbClr val="333844"/>
+                  <a:srgbClr val="465461"/>
                 </a:solidFill>
-                <a:latin typeface="Calibri"/>
+                <a:latin typeface="Arial"/>
               </a:rPr>
               <a:t>▸  Aristas ocultas — datos rarísimos en leaks</a:t>
             </a:r>
@@ -7647,9 +7345,9 @@
             <a:r>
               <a:rPr sz="1600">
                 <a:solidFill>
-                  <a:srgbClr val="333844"/>
+                  <a:srgbClr val="465461"/>
                 </a:solidFill>
-                <a:latin typeface="Calibri"/>
+                <a:latin typeface="Arial"/>
               </a:rPr>
               <a:t>▸  Refleja confianza real entre actores</a:t>
             </a:r>
@@ -7658,9 +7356,9 @@
             <a:r>
               <a:rPr sz="1600">
                 <a:solidFill>
-                  <a:srgbClr val="333844"/>
+                  <a:srgbClr val="465461"/>
                 </a:solidFill>
-                <a:latin typeface="Calibri"/>
+                <a:latin typeface="Arial"/>
               </a:rPr>
               <a:t>▸  Broker privado ≠ broker público (casi siempre)</a:t>
             </a:r>
@@ -7669,9 +7367,9 @@
             <a:r>
               <a:rPr sz="1600">
                 <a:solidFill>
-                  <a:srgbClr val="333844"/>
+                  <a:srgbClr val="465461"/>
                 </a:solidFill>
-                <a:latin typeface="Calibri"/>
+                <a:latin typeface="Arial"/>
               </a:rPr>
               <a:t>▸  Cuando está disponible, es el dato más valioso</a:t>
             </a:r>
@@ -7712,12 +7410,6 @@
           <a:lstStyle/>
           <a:p>
             <a:r>
-              <a:rPr sz="2400" b="1">
-                <a:solidFill>
-                  <a:srgbClr val="1A1A2E"/>
-                </a:solidFill>
-                <a:latin typeface="Calibri"/>
-              </a:rPr>
               <a:t>Pivoting de identidades — el análisis más potente</a:t>
             </a:r>
           </a:p>
@@ -7733,92 +7425,43 @@
             <p:ph type="body" idx="16" sz="quarter"/>
           </p:nvPr>
         </p:nvSpPr>
-        <p:spPr/>
+        <p:spPr>
+          <a:xfrm>
+            <a:off x="1073427" y="2077576"/>
+            <a:ext cx="10084904" cy="3507298"/>
+          </a:xfrm>
+        </p:spPr>
         <p:txBody>
           <a:bodyPr wrap="square"/>
           <a:lstStyle/>
           <a:p>
-            <a:pPr algn="l" marL="0" indent="-228600">
-              <a:buNone/>
-            </a:pPr>
-            <a:r>
-              <a:rPr sz="1900" b="0">
-                <a:solidFill>
-                  <a:srgbClr val="333844"/>
-                </a:solidFill>
-                <a:latin typeface="Calibri"/>
-              </a:rPr>
-              <a:t>▸  Hipótesis: los operadores reutilizan handles, emails y patrones de comportamiento</a:t>
-            </a:r>
-          </a:p>
-          <a:p>
-            <a:pPr algn="l" marL="0" indent="-228600">
-              <a:buNone/>
-            </a:pPr>
-            <a:r>
-              <a:rPr sz="1900" b="0">
-                <a:solidFill>
-                  <a:srgbClr val="333844"/>
-                </a:solidFill>
-                <a:latin typeface="Calibri"/>
-              </a:rPr>
-              <a:t>▸  Paso 1: normalizar identidades (lowercase, eliminar variaciones comunes)</a:t>
-            </a:r>
-          </a:p>
-          <a:p>
-            <a:pPr algn="l" marL="0" indent="-228600">
-              <a:buNone/>
-            </a:pPr>
-            <a:r>
-              <a:rPr sz="1900" b="0">
-                <a:solidFill>
-                  <a:srgbClr val="333844"/>
-                </a:solidFill>
-                <a:latin typeface="Calibri"/>
-              </a:rPr>
-              <a:t>▸  Paso 2: matching exacto → matches de alta confianza sin falsos positivos</a:t>
-            </a:r>
-          </a:p>
-          <a:p>
-            <a:pPr algn="l" marL="0" indent="-228600">
-              <a:buNone/>
-            </a:pPr>
-            <a:r>
-              <a:rPr sz="1900" b="0">
-                <a:solidFill>
-                  <a:srgbClr val="333844"/>
-                </a:solidFill>
-                <a:latin typeface="Calibri"/>
-              </a:rPr>
-              <a:t>▸  Paso 3: fuzzy matching (rapidfuzz, threshold ≥85%) → variaciones deliberadas</a:t>
-            </a:r>
-          </a:p>
-          <a:p>
-            <a:pPr algn="l" marL="0" indent="-228600">
-              <a:buNone/>
-            </a:pPr>
-            <a:r>
-              <a:rPr sz="1900" b="0">
-                <a:solidFill>
-                  <a:srgbClr val="333844"/>
-                </a:solidFill>
-                <a:latin typeface="Calibri"/>
-              </a:rPr>
-              <a:t>▸  Resultado: grafo de identidades donde un nodo es el mismo actor en N plataformas</a:t>
-            </a:r>
-          </a:p>
-          <a:p>
-            <a:pPr algn="l" marL="0" indent="-228600">
-              <a:buNone/>
-            </a:pPr>
-            <a:r>
-              <a:rPr sz="1900" b="0">
-                <a:solidFill>
-                  <a:srgbClr val="333844"/>
-                </a:solidFill>
-                <a:latin typeface="Calibri"/>
-              </a:rPr>
-              <a:t>▸  Esto es pivoting manual — la base de cualquier investigación cross-foro</a:t>
+            <a:r>
+              <a:t>Hipótesis: los operadores reutilizan handles, emails y patrones de comportamiento</a:t>
+            </a:r>
+          </a:p>
+          <a:p>
+            <a:r>
+              <a:t>Paso 1: normalizar identidades (lowercase, eliminar variaciones comunes)</a:t>
+            </a:r>
+          </a:p>
+          <a:p>
+            <a:r>
+              <a:t>Paso 2: matching exacto → matches de alta confianza sin falsos positivos</a:t>
+            </a:r>
+          </a:p>
+          <a:p>
+            <a:r>
+              <a:t>Paso 3: fuzzy matching (rapidfuzz, threshold ≥85%) → variaciones deliberadas</a:t>
+            </a:r>
+          </a:p>
+          <a:p>
+            <a:r>
+              <a:t>Resultado: grafo de identidades donde un nodo es el mismo actor en N plataformas</a:t>
+            </a:r>
+          </a:p>
+          <a:p>
+            <a:r>
+              <a:t>Esto es pivoting manual — la base de cualquier investigación cross-foro</a:t>
             </a:r>
           </a:p>
         </p:txBody>
@@ -7856,34 +7499,31 @@
           <a:bodyPr wrap="square"/>
           <a:lstStyle/>
           <a:p>
+            <a:pPr algn="ctr"/>
             <a:r>
               <a:rPr sz="1300" b="1">
                 <a:solidFill>
-                  <a:srgbClr val="E32B3D"/>
+                  <a:srgbClr val="CD2D37"/>
                 </a:solidFill>
-                <a:latin typeface="Calibri"/>
+                <a:latin typeface="Arial"/>
               </a:rPr>
               <a:t>SECCIÓN 3</a:t>
             </a:r>
           </a:p>
           <a:p>
-            <a:r>
-              <a:rPr sz="3000" b="1">
-                <a:solidFill>
-                  <a:srgbClr val="FFFFFF"/>
-                </a:solidFill>
-                <a:latin typeface="Calibri"/>
-              </a:rPr>
+            <a:pPr algn="ctr"/>
+            <a:r>
               <a:t>Análisis temporal y text mining</a:t>
             </a:r>
           </a:p>
           <a:p>
+            <a:pPr algn="ctr"/>
             <a:r>
               <a:rPr sz="1600">
                 <a:solidFill>
                   <a:srgbClr val="D6DAE2"/>
                 </a:solidFill>
-                <a:latin typeface="Calibri"/>
+                <a:latin typeface="Arial"/>
               </a:rPr>
               <a:t>Tiempo y frecuencia antes de semántica</a:t>
             </a:r>

--- a/bloque1_bigdata/csbc26_b1_bigdata.pptx
+++ b/bloque1_bigdata/csbc26_b1_bigdata.pptx
@@ -5661,921 +5661,484 @@
           <a:p/>
         </p:txBody>
       </p:sp>
-      <p:sp>
-        <p:nvSpPr>
-          <p:cNvPr id="4" name="Rectangle 3"/>
-          <p:cNvSpPr/>
+      <p:graphicFrame>
+        <p:nvGraphicFramePr>
+          <p:cNvPr id="4" name="Table 3"/>
+          <p:cNvGraphicFramePr>
+            <a:graphicFrameLocks noGrp="1"/>
+          </p:cNvGraphicFramePr>
           <p:nvPr/>
-        </p:nvSpPr>
-        <p:spPr>
-          <a:xfrm>
-            <a:off x="1051560" y="2651760"/>
-            <a:ext cx="10058400" cy="365760"/>
-          </a:xfrm>
-          <a:prstGeom prst="rect">
-            <a:avLst/>
-          </a:prstGeom>
-          <a:solidFill>
-            <a:srgbClr val="CD2D37"/>
-          </a:solidFill>
-          <a:ln>
-            <a:noFill/>
-          </a:ln>
-        </p:spPr>
-        <p:style>
-          <a:lnRef idx="1">
-            <a:schemeClr val="accent1"/>
-          </a:lnRef>
-          <a:fillRef idx="3">
-            <a:schemeClr val="accent1"/>
-          </a:fillRef>
-          <a:effectRef idx="2">
-            <a:schemeClr val="accent1"/>
-          </a:effectRef>
-          <a:fontRef idx="minor">
-            <a:schemeClr val="lt1"/>
-          </a:fontRef>
-        </p:style>
-        <p:txBody>
-          <a:bodyPr rtlCol="0" anchor="ctr"/>
-          <a:lstStyle/>
-          <a:p>
-            <a:pPr algn="ctr"/>
-          </a:p>
-        </p:txBody>
-      </p:sp>
-      <p:sp>
-        <p:nvSpPr>
-          <p:cNvPr id="5" name="TextBox 4"/>
-          <p:cNvSpPr txBox="1"/>
-          <p:nvPr/>
-        </p:nvSpPr>
-        <p:spPr>
-          <a:xfrm>
-            <a:off x="1097280" y="2706760"/>
-            <a:ext cx="2423160" cy="365760"/>
-          </a:xfrm>
-          <a:prstGeom prst="rect">
-            <a:avLst/>
-          </a:prstGeom>
-          <a:noFill/>
-        </p:spPr>
-        <p:txBody>
-          <a:bodyPr wrap="square">
-            <a:spAutoFit/>
-          </a:bodyPr>
-          <a:lstStyle/>
-          <a:p>
-            <a:pPr algn="l"/>
-            <a:r>
-              <a:rPr sz="1200" b="1">
-                <a:solidFill>
-                  <a:srgbClr val="FFFFFF"/>
-                </a:solidFill>
-                <a:latin typeface="Arial"/>
-              </a:rPr>
-              <a:t>Técnica</a:t>
-            </a:r>
-          </a:p>
-        </p:txBody>
-      </p:sp>
-      <p:sp>
-        <p:nvSpPr>
-          <p:cNvPr id="6" name="TextBox 5"/>
-          <p:cNvSpPr txBox="1"/>
-          <p:nvPr/>
-        </p:nvSpPr>
-        <p:spPr>
-          <a:xfrm>
-            <a:off x="3611880" y="2706760"/>
-            <a:ext cx="2423160" cy="365760"/>
-          </a:xfrm>
-          <a:prstGeom prst="rect">
-            <a:avLst/>
-          </a:prstGeom>
-          <a:noFill/>
-        </p:spPr>
-        <p:txBody>
-          <a:bodyPr wrap="square">
-            <a:spAutoFit/>
-          </a:bodyPr>
-          <a:lstStyle/>
-          <a:p>
-            <a:pPr algn="l"/>
-            <a:r>
-              <a:rPr sz="1200" b="1">
-                <a:solidFill>
-                  <a:srgbClr val="FFFFFF"/>
-                </a:solidFill>
-                <a:latin typeface="Arial"/>
-              </a:rPr>
-              <a:t>Original</a:t>
-            </a:r>
-          </a:p>
-        </p:txBody>
-      </p:sp>
-      <p:sp>
-        <p:nvSpPr>
-          <p:cNvPr id="7" name="TextBox 6"/>
-          <p:cNvSpPr txBox="1"/>
-          <p:nvPr/>
-        </p:nvSpPr>
-        <p:spPr>
-          <a:xfrm>
-            <a:off x="6126480" y="2706760"/>
-            <a:ext cx="2423160" cy="365760"/>
-          </a:xfrm>
-          <a:prstGeom prst="rect">
-            <a:avLst/>
-          </a:prstGeom>
-          <a:noFill/>
-        </p:spPr>
-        <p:txBody>
-          <a:bodyPr wrap="square">
-            <a:spAutoFit/>
-          </a:bodyPr>
-          <a:lstStyle/>
-          <a:p>
-            <a:pPr algn="l"/>
-            <a:r>
-              <a:rPr sz="1200" b="1">
-                <a:solidFill>
-                  <a:srgbClr val="FFFFFF"/>
-                </a:solidFill>
-                <a:latin typeface="Arial"/>
-              </a:rPr>
-              <a:t>Traducción</a:t>
-            </a:r>
-          </a:p>
-        </p:txBody>
-      </p:sp>
-      <p:sp>
-        <p:nvSpPr>
-          <p:cNvPr id="8" name="TextBox 7"/>
-          <p:cNvSpPr txBox="1"/>
-          <p:nvPr/>
-        </p:nvSpPr>
-        <p:spPr>
-          <a:xfrm>
-            <a:off x="8641080" y="2706760"/>
-            <a:ext cx="2423160" cy="365760"/>
-          </a:xfrm>
-          <a:prstGeom prst="rect">
-            <a:avLst/>
-          </a:prstGeom>
-          <a:noFill/>
-        </p:spPr>
-        <p:txBody>
-          <a:bodyPr wrap="square">
-            <a:spAutoFit/>
-          </a:bodyPr>
-          <a:lstStyle/>
-          <a:p>
-            <a:pPr algn="l"/>
-            <a:r>
-              <a:rPr sz="1200" b="1">
-                <a:solidFill>
-                  <a:srgbClr val="FFFFFF"/>
-                </a:solidFill>
-                <a:latin typeface="Arial"/>
-              </a:rPr>
-              <a:t>Por qué</a:t>
-            </a:r>
-          </a:p>
-        </p:txBody>
-      </p:sp>
-      <p:sp>
-        <p:nvSpPr>
-          <p:cNvPr id="9" name="Rectangle 8"/>
-          <p:cNvSpPr/>
-          <p:nvPr/>
-        </p:nvSpPr>
-        <p:spPr>
-          <a:xfrm>
-            <a:off x="1051560" y="3017520"/>
-            <a:ext cx="10058400" cy="615315"/>
-          </a:xfrm>
-          <a:prstGeom prst="rect">
-            <a:avLst/>
-          </a:prstGeom>
-          <a:solidFill>
-            <a:srgbClr val="F1F2F6"/>
-          </a:solidFill>
-          <a:ln>
-            <a:noFill/>
-          </a:ln>
-        </p:spPr>
-        <p:style>
-          <a:lnRef idx="1">
-            <a:schemeClr val="accent1"/>
-          </a:lnRef>
-          <a:fillRef idx="3">
-            <a:schemeClr val="accent1"/>
-          </a:fillRef>
-          <a:effectRef idx="2">
-            <a:schemeClr val="accent1"/>
-          </a:effectRef>
-          <a:fontRef idx="minor">
-            <a:schemeClr val="lt1"/>
-          </a:fontRef>
-        </p:style>
-        <p:txBody>
-          <a:bodyPr rtlCol="0" anchor="ctr"/>
-          <a:lstStyle/>
-          <a:p>
-            <a:pPr algn="ctr"/>
-          </a:p>
-        </p:txBody>
-      </p:sp>
-      <p:sp>
-        <p:nvSpPr>
-          <p:cNvPr id="10" name="TextBox 9"/>
-          <p:cNvSpPr txBox="1"/>
-          <p:nvPr/>
-        </p:nvSpPr>
-        <p:spPr>
-          <a:xfrm>
-            <a:off x="1097280" y="3057520"/>
-            <a:ext cx="2423160" cy="615315"/>
-          </a:xfrm>
-          <a:prstGeom prst="rect">
-            <a:avLst/>
-          </a:prstGeom>
-          <a:noFill/>
-        </p:spPr>
-        <p:txBody>
-          <a:bodyPr wrap="square">
-            <a:spAutoFit/>
-          </a:bodyPr>
-          <a:lstStyle/>
-          <a:p>
-            <a:pPr algn="l"/>
-            <a:r>
-              <a:rPr sz="1100" b="0">
-                <a:solidFill>
-                  <a:srgbClr val="465461"/>
-                </a:solidFill>
-                <a:latin typeface="Arial"/>
-              </a:rPr>
-              <a:t>TF-IDF</a:t>
-            </a:r>
-          </a:p>
-        </p:txBody>
-      </p:sp>
-      <p:sp>
-        <p:nvSpPr>
-          <p:cNvPr id="11" name="TextBox 10"/>
-          <p:cNvSpPr txBox="1"/>
-          <p:nvPr/>
-        </p:nvSpPr>
-        <p:spPr>
-          <a:xfrm>
-            <a:off x="3611880" y="3057520"/>
-            <a:ext cx="2423160" cy="615315"/>
-          </a:xfrm>
-          <a:prstGeom prst="rect">
-            <a:avLst/>
-          </a:prstGeom>
-          <a:noFill/>
-        </p:spPr>
-        <p:txBody>
-          <a:bodyPr wrap="square">
-            <a:spAutoFit/>
-          </a:bodyPr>
-          <a:lstStyle/>
-          <a:p>
-            <a:pPr algn="l"/>
-            <a:r>
-              <a:rPr sz="1100" b="0">
-                <a:solidFill>
-                  <a:srgbClr val="465461"/>
-                </a:solidFill>
-                <a:latin typeface="Arial"/>
-              </a:rPr>
-              <a:t>✓ si hay stopwords del idioma</a:t>
-            </a:r>
-          </a:p>
-        </p:txBody>
-      </p:sp>
-      <p:sp>
-        <p:nvSpPr>
-          <p:cNvPr id="12" name="TextBox 11"/>
-          <p:cNvSpPr txBox="1"/>
-          <p:nvPr/>
-        </p:nvSpPr>
-        <p:spPr>
-          <a:xfrm>
-            <a:off x="6126480" y="3057520"/>
-            <a:ext cx="2423160" cy="615315"/>
-          </a:xfrm>
-          <a:prstGeom prst="rect">
-            <a:avLst/>
-          </a:prstGeom>
-          <a:noFill/>
-        </p:spPr>
-        <p:txBody>
-          <a:bodyPr wrap="square">
-            <a:spAutoFit/>
-          </a:bodyPr>
-          <a:lstStyle/>
-          <a:p>
-            <a:pPr algn="l"/>
-            <a:r>
-              <a:rPr sz="1100" b="0">
-                <a:solidFill>
-                  <a:srgbClr val="465461"/>
-                </a:solidFill>
-                <a:latin typeface="Arial"/>
-              </a:rPr>
-              <a:t>✓ si no hay</a:t>
-            </a:r>
-          </a:p>
-        </p:txBody>
-      </p:sp>
-      <p:sp>
-        <p:nvSpPr>
-          <p:cNvPr id="13" name="TextBox 12"/>
-          <p:cNvSpPr txBox="1"/>
-          <p:nvPr/>
-        </p:nvSpPr>
-        <p:spPr>
-          <a:xfrm>
-            <a:off x="8641080" y="3057520"/>
-            <a:ext cx="2423160" cy="615315"/>
-          </a:xfrm>
-          <a:prstGeom prst="rect">
-            <a:avLst/>
-          </a:prstGeom>
-          <a:noFill/>
-        </p:spPr>
-        <p:txBody>
-          <a:bodyPr wrap="square">
-            <a:spAutoFit/>
-          </a:bodyPr>
-          <a:lstStyle/>
-          <a:p>
-            <a:pPr algn="l"/>
-            <a:r>
-              <a:rPr sz="1100" b="0">
-                <a:solidFill>
-                  <a:srgbClr val="465461"/>
-                </a:solidFill>
-                <a:latin typeface="Arial"/>
-              </a:rPr>
-              <a:t>Las stopwords en inglés no eliminan preposiciones rusas</a:t>
-            </a:r>
-          </a:p>
-        </p:txBody>
-      </p:sp>
-      <p:sp>
-        <p:nvSpPr>
-          <p:cNvPr id="14" name="Rectangle 13"/>
-          <p:cNvSpPr/>
-          <p:nvPr/>
-        </p:nvSpPr>
-        <p:spPr>
-          <a:xfrm>
-            <a:off x="1051560" y="3632835"/>
-            <a:ext cx="10058400" cy="440689"/>
-          </a:xfrm>
-          <a:prstGeom prst="rect">
-            <a:avLst/>
-          </a:prstGeom>
-          <a:solidFill>
-            <a:srgbClr val="FFFFFF"/>
-          </a:solidFill>
-          <a:ln>
-            <a:noFill/>
-          </a:ln>
-        </p:spPr>
-        <p:style>
-          <a:lnRef idx="1">
-            <a:schemeClr val="accent1"/>
-          </a:lnRef>
-          <a:fillRef idx="3">
-            <a:schemeClr val="accent1"/>
-          </a:fillRef>
-          <a:effectRef idx="2">
-            <a:schemeClr val="accent1"/>
-          </a:effectRef>
-          <a:fontRef idx="minor">
-            <a:schemeClr val="lt1"/>
-          </a:fontRef>
-        </p:style>
-        <p:txBody>
-          <a:bodyPr rtlCol="0" anchor="ctr"/>
-          <a:lstStyle/>
-          <a:p>
-            <a:pPr algn="ctr"/>
-          </a:p>
-        </p:txBody>
-      </p:sp>
-      <p:sp>
-        <p:nvSpPr>
-          <p:cNvPr id="15" name="TextBox 14"/>
-          <p:cNvSpPr txBox="1"/>
-          <p:nvPr/>
-        </p:nvSpPr>
-        <p:spPr>
-          <a:xfrm>
-            <a:off x="1097280" y="3672835"/>
-            <a:ext cx="2423160" cy="440689"/>
-          </a:xfrm>
-          <a:prstGeom prst="rect">
-            <a:avLst/>
-          </a:prstGeom>
-          <a:noFill/>
-        </p:spPr>
-        <p:txBody>
-          <a:bodyPr wrap="square">
-            <a:spAutoFit/>
-          </a:bodyPr>
-          <a:lstStyle/>
-          <a:p>
-            <a:pPr algn="l"/>
-            <a:r>
-              <a:rPr sz="1100" b="0">
-                <a:solidFill>
-                  <a:srgbClr val="465461"/>
-                </a:solidFill>
-                <a:latin typeface="Arial"/>
-              </a:rPr>
-              <a:t>LDA</a:t>
-            </a:r>
-          </a:p>
-        </p:txBody>
-      </p:sp>
-      <p:sp>
-        <p:nvSpPr>
-          <p:cNvPr id="16" name="TextBox 15"/>
-          <p:cNvSpPr txBox="1"/>
-          <p:nvPr/>
-        </p:nvSpPr>
-        <p:spPr>
-          <a:xfrm>
-            <a:off x="3611880" y="3672835"/>
-            <a:ext cx="2423160" cy="440689"/>
-          </a:xfrm>
-          <a:prstGeom prst="rect">
-            <a:avLst/>
-          </a:prstGeom>
-          <a:noFill/>
-        </p:spPr>
-        <p:txBody>
-          <a:bodyPr wrap="square">
-            <a:spAutoFit/>
-          </a:bodyPr>
-          <a:lstStyle/>
-          <a:p>
-            <a:pPr algn="l"/>
-            <a:r>
-              <a:rPr sz="1100" b="0">
-                <a:solidFill>
-                  <a:srgbClr val="465461"/>
-                </a:solidFill>
-                <a:latin typeface="Arial"/>
-              </a:rPr>
-              <a:t>✓ con tokenización correcta</a:t>
-            </a:r>
-          </a:p>
-        </p:txBody>
-      </p:sp>
-      <p:sp>
-        <p:nvSpPr>
-          <p:cNvPr id="17" name="TextBox 16"/>
-          <p:cNvSpPr txBox="1"/>
-          <p:nvPr/>
-        </p:nvSpPr>
-        <p:spPr>
-          <a:xfrm>
-            <a:off x="6126480" y="3672835"/>
-            <a:ext cx="2423160" cy="440689"/>
-          </a:xfrm>
-          <a:prstGeom prst="rect">
-            <a:avLst/>
-          </a:prstGeom>
-          <a:noFill/>
-        </p:spPr>
-        <p:txBody>
-          <a:bodyPr wrap="square">
-            <a:spAutoFit/>
-          </a:bodyPr>
-          <a:lstStyle/>
-          <a:p>
-            <a:pPr algn="l"/>
-            <a:r>
-              <a:rPr sz="1100" b="0">
-                <a:solidFill>
-                  <a:srgbClr val="465461"/>
-                </a:solidFill>
-                <a:latin typeface="Arial"/>
-              </a:rPr>
-              <a:t>Aceptable</a:t>
-            </a:r>
-          </a:p>
-        </p:txBody>
-      </p:sp>
-      <p:sp>
-        <p:nvSpPr>
-          <p:cNvPr id="18" name="TextBox 17"/>
-          <p:cNvSpPr txBox="1"/>
-          <p:nvPr/>
-        </p:nvSpPr>
-        <p:spPr>
-          <a:xfrm>
-            <a:off x="8641080" y="3672835"/>
-            <a:ext cx="2423160" cy="440689"/>
-          </a:xfrm>
-          <a:prstGeom prst="rect">
-            <a:avLst/>
-          </a:prstGeom>
-          <a:noFill/>
-        </p:spPr>
-        <p:txBody>
-          <a:bodyPr wrap="square">
-            <a:spAutoFit/>
-          </a:bodyPr>
-          <a:lstStyle/>
-          <a:p>
-            <a:pPr algn="l"/>
-            <a:r>
-              <a:rPr sz="1100" b="0">
-                <a:solidFill>
-                  <a:srgbClr val="465461"/>
-                </a:solidFill>
-                <a:latin typeface="Arial"/>
-              </a:rPr>
-              <a:t>Sin tokenizador multilingüe, los topics son ruido</a:t>
-            </a:r>
-          </a:p>
-        </p:txBody>
-      </p:sp>
-      <p:sp>
-        <p:nvSpPr>
-          <p:cNvPr id="19" name="Rectangle 18"/>
-          <p:cNvSpPr/>
-          <p:nvPr/>
-        </p:nvSpPr>
-        <p:spPr>
-          <a:xfrm>
-            <a:off x="1051560" y="4073525"/>
-            <a:ext cx="10058400" cy="440689"/>
-          </a:xfrm>
-          <a:prstGeom prst="rect">
-            <a:avLst/>
-          </a:prstGeom>
-          <a:solidFill>
-            <a:srgbClr val="F1F2F6"/>
-          </a:solidFill>
-          <a:ln>
-            <a:noFill/>
-          </a:ln>
-        </p:spPr>
-        <p:style>
-          <a:lnRef idx="1">
-            <a:schemeClr val="accent1"/>
-          </a:lnRef>
-          <a:fillRef idx="3">
-            <a:schemeClr val="accent1"/>
-          </a:fillRef>
-          <a:effectRef idx="2">
-            <a:schemeClr val="accent1"/>
-          </a:effectRef>
-          <a:fontRef idx="minor">
-            <a:schemeClr val="lt1"/>
-          </a:fontRef>
-        </p:style>
-        <p:txBody>
-          <a:bodyPr rtlCol="0" anchor="ctr"/>
-          <a:lstStyle/>
-          <a:p>
-            <a:pPr algn="ctr"/>
-          </a:p>
-        </p:txBody>
-      </p:sp>
-      <p:sp>
-        <p:nvSpPr>
-          <p:cNvPr id="20" name="TextBox 19"/>
-          <p:cNvSpPr txBox="1"/>
-          <p:nvPr/>
-        </p:nvSpPr>
-        <p:spPr>
-          <a:xfrm>
-            <a:off x="1097280" y="4113525"/>
-            <a:ext cx="2423160" cy="440689"/>
-          </a:xfrm>
-          <a:prstGeom prst="rect">
-            <a:avLst/>
-          </a:prstGeom>
-          <a:noFill/>
-        </p:spPr>
-        <p:txBody>
-          <a:bodyPr wrap="square">
-            <a:spAutoFit/>
-          </a:bodyPr>
-          <a:lstStyle/>
-          <a:p>
-            <a:pPr algn="l"/>
-            <a:r>
-              <a:rPr sz="1100" b="0">
-                <a:solidFill>
-                  <a:srgbClr val="465461"/>
-                </a:solidFill>
-                <a:latin typeface="Arial"/>
-              </a:rPr>
-              <a:t>Estadística</a:t>
-            </a:r>
-          </a:p>
-        </p:txBody>
-      </p:sp>
-      <p:sp>
-        <p:nvSpPr>
-          <p:cNvPr id="21" name="TextBox 20"/>
-          <p:cNvSpPr txBox="1"/>
-          <p:nvPr/>
-        </p:nvSpPr>
-        <p:spPr>
-          <a:xfrm>
-            <a:off x="3611880" y="4113525"/>
-            <a:ext cx="2423160" cy="440689"/>
-          </a:xfrm>
-          <a:prstGeom prst="rect">
-            <a:avLst/>
-          </a:prstGeom>
-          <a:noFill/>
-        </p:spPr>
-        <p:txBody>
-          <a:bodyPr wrap="square">
-            <a:spAutoFit/>
-          </a:bodyPr>
-          <a:lstStyle/>
-          <a:p>
-            <a:pPr algn="l"/>
-            <a:r>
-              <a:rPr sz="1100" b="0">
-                <a:solidFill>
-                  <a:srgbClr val="465461"/>
-                </a:solidFill>
-                <a:latin typeface="Arial"/>
-              </a:rPr>
-              <a:t>✓ siempre</a:t>
-            </a:r>
-          </a:p>
-        </p:txBody>
-      </p:sp>
-      <p:sp>
-        <p:nvSpPr>
-          <p:cNvPr id="22" name="TextBox 21"/>
-          <p:cNvSpPr txBox="1"/>
-          <p:nvPr/>
-        </p:nvSpPr>
-        <p:spPr>
-          <a:xfrm>
-            <a:off x="6126480" y="4113525"/>
-            <a:ext cx="2423160" cy="440689"/>
-          </a:xfrm>
-          <a:prstGeom prst="rect">
-            <a:avLst/>
-          </a:prstGeom>
-          <a:noFill/>
-        </p:spPr>
-        <p:txBody>
-          <a:bodyPr wrap="square">
-            <a:spAutoFit/>
-          </a:bodyPr>
-          <a:lstStyle/>
-          <a:p>
-            <a:pPr algn="l"/>
-            <a:r>
-              <a:rPr sz="1100" b="0">
-                <a:solidFill>
-                  <a:srgbClr val="465461"/>
-                </a:solidFill>
-                <a:latin typeface="Arial"/>
-              </a:rPr>
-              <a:t>No necesaria</a:t>
-            </a:r>
-          </a:p>
-        </p:txBody>
-      </p:sp>
-      <p:sp>
-        <p:nvSpPr>
-          <p:cNvPr id="23" name="TextBox 22"/>
-          <p:cNvSpPr txBox="1"/>
-          <p:nvPr/>
-        </p:nvSpPr>
-        <p:spPr>
-          <a:xfrm>
-            <a:off x="8641080" y="4113525"/>
-            <a:ext cx="2423160" cy="440689"/>
-          </a:xfrm>
-          <a:prstGeom prst="rect">
-            <a:avLst/>
-          </a:prstGeom>
-          <a:noFill/>
-        </p:spPr>
-        <p:txBody>
-          <a:bodyPr wrap="square">
-            <a:spAutoFit/>
-          </a:bodyPr>
-          <a:lstStyle/>
-          <a:p>
-            <a:pPr algn="l"/>
-            <a:r>
-              <a:rPr sz="1100" b="0">
-                <a:solidFill>
-                  <a:srgbClr val="465461"/>
-                </a:solidFill>
-                <a:latin typeface="Arial"/>
-              </a:rPr>
-              <a:t>Longitud, fechas, recuentos no dependen del idioma</a:t>
-            </a:r>
-          </a:p>
-        </p:txBody>
-      </p:sp>
-      <p:sp>
-        <p:nvSpPr>
-          <p:cNvPr id="24" name="Rectangle 23"/>
-          <p:cNvSpPr/>
-          <p:nvPr/>
-        </p:nvSpPr>
-        <p:spPr>
-          <a:xfrm>
-            <a:off x="1051560" y="4514215"/>
-            <a:ext cx="10058400" cy="615315"/>
-          </a:xfrm>
-          <a:prstGeom prst="rect">
-            <a:avLst/>
-          </a:prstGeom>
-          <a:solidFill>
-            <a:srgbClr val="FFFFFF"/>
-          </a:solidFill>
-          <a:ln>
-            <a:noFill/>
-          </a:ln>
-        </p:spPr>
-        <p:style>
-          <a:lnRef idx="1">
-            <a:schemeClr val="accent1"/>
-          </a:lnRef>
-          <a:fillRef idx="3">
-            <a:schemeClr val="accent1"/>
-          </a:fillRef>
-          <a:effectRef idx="2">
-            <a:schemeClr val="accent1"/>
-          </a:effectRef>
-          <a:fontRef idx="minor">
-            <a:schemeClr val="lt1"/>
-          </a:fontRef>
-        </p:style>
-        <p:txBody>
-          <a:bodyPr rtlCol="0" anchor="ctr"/>
-          <a:lstStyle/>
-          <a:p>
-            <a:pPr algn="ctr"/>
-          </a:p>
-        </p:txBody>
-      </p:sp>
-      <p:sp>
-        <p:nvSpPr>
-          <p:cNvPr id="25" name="TextBox 24"/>
-          <p:cNvSpPr txBox="1"/>
-          <p:nvPr/>
-        </p:nvSpPr>
-        <p:spPr>
-          <a:xfrm>
-            <a:off x="1097280" y="4554215"/>
-            <a:ext cx="2423160" cy="615315"/>
-          </a:xfrm>
-          <a:prstGeom prst="rect">
-            <a:avLst/>
-          </a:prstGeom>
-          <a:noFill/>
-        </p:spPr>
-        <p:txBody>
-          <a:bodyPr wrap="square">
-            <a:spAutoFit/>
-          </a:bodyPr>
-          <a:lstStyle/>
-          <a:p>
-            <a:pPr algn="l"/>
-            <a:r>
-              <a:rPr sz="1100" b="0">
-                <a:solidFill>
-                  <a:srgbClr val="465461"/>
-                </a:solidFill>
-                <a:latin typeface="Arial"/>
-              </a:rPr>
-              <a:t>Red social</a:t>
-            </a:r>
-          </a:p>
-        </p:txBody>
-      </p:sp>
-      <p:sp>
-        <p:nvSpPr>
-          <p:cNvPr id="26" name="TextBox 25"/>
-          <p:cNvSpPr txBox="1"/>
-          <p:nvPr/>
-        </p:nvSpPr>
-        <p:spPr>
-          <a:xfrm>
-            <a:off x="3611880" y="4554215"/>
-            <a:ext cx="2423160" cy="615315"/>
-          </a:xfrm>
-          <a:prstGeom prst="rect">
-            <a:avLst/>
-          </a:prstGeom>
-          <a:noFill/>
-        </p:spPr>
-        <p:txBody>
-          <a:bodyPr wrap="square">
-            <a:spAutoFit/>
-          </a:bodyPr>
-          <a:lstStyle/>
-          <a:p>
-            <a:pPr algn="l"/>
-            <a:r>
-              <a:rPr sz="1100" b="0">
-                <a:solidFill>
-                  <a:srgbClr val="465461"/>
-                </a:solidFill>
-                <a:latin typeface="Arial"/>
-              </a:rPr>
-              <a:t>✓ siempre</a:t>
-            </a:r>
-          </a:p>
-        </p:txBody>
-      </p:sp>
-      <p:sp>
-        <p:nvSpPr>
-          <p:cNvPr id="27" name="TextBox 26"/>
-          <p:cNvSpPr txBox="1"/>
-          <p:nvPr/>
-        </p:nvSpPr>
-        <p:spPr>
-          <a:xfrm>
-            <a:off x="6126480" y="4554215"/>
-            <a:ext cx="2423160" cy="615315"/>
-          </a:xfrm>
-          <a:prstGeom prst="rect">
-            <a:avLst/>
-          </a:prstGeom>
-          <a:noFill/>
-        </p:spPr>
-        <p:txBody>
-          <a:bodyPr wrap="square">
-            <a:spAutoFit/>
-          </a:bodyPr>
-          <a:lstStyle/>
-          <a:p>
-            <a:pPr algn="l"/>
-            <a:r>
-              <a:rPr sz="1100" b="0">
-                <a:solidFill>
-                  <a:srgbClr val="465461"/>
-                </a:solidFill>
-                <a:latin typeface="Arial"/>
-              </a:rPr>
-              <a:t>No necesaria</a:t>
-            </a:r>
-          </a:p>
-        </p:txBody>
-      </p:sp>
-      <p:sp>
-        <p:nvSpPr>
-          <p:cNvPr id="28" name="TextBox 27"/>
-          <p:cNvSpPr txBox="1"/>
-          <p:nvPr/>
-        </p:nvSpPr>
-        <p:spPr>
-          <a:xfrm>
-            <a:off x="8641080" y="4554215"/>
-            <a:ext cx="2423160" cy="615315"/>
-          </a:xfrm>
-          <a:prstGeom prst="rect">
-            <a:avLst/>
-          </a:prstGeom>
-          <a:noFill/>
-        </p:spPr>
-        <p:txBody>
-          <a:bodyPr wrap="square">
-            <a:spAutoFit/>
-          </a:bodyPr>
-          <a:lstStyle/>
-          <a:p>
-            <a:pPr algn="l"/>
-            <a:r>
-              <a:rPr sz="1100" b="0">
-                <a:solidFill>
-                  <a:srgbClr val="465461"/>
-                </a:solidFill>
-                <a:latin typeface="Arial"/>
-              </a:rPr>
-              <a:t>Las aristas del grafo son independientes del idioma</a:t>
-            </a:r>
-          </a:p>
-        </p:txBody>
-      </p:sp>
+        </p:nvGraphicFramePr>
+        <p:xfrm>
+          <a:off x="1051560" y="2651760"/>
+          <a:ext cx="10058400" cy="1828800"/>
+        </p:xfrm>
+        <a:graphic>
+          <a:graphicData uri="http://schemas.openxmlformats.org/drawingml/2006/table">
+            <a:tbl>
+              <a:tblPr>
+                <a:tableStyleId>{5C22544A-7EE6-4342-B048-85BDC9FD1C3A}</a:tableStyleId>
+              </a:tblPr>
+              <a:tblGrid>
+                <a:gridCol w="2514600"/>
+                <a:gridCol w="2514600"/>
+                <a:gridCol w="2514600"/>
+                <a:gridCol w="2514600"/>
+              </a:tblGrid>
+              <a:tr h="365760">
+                <a:tc>
+                  <a:txBody>
+                    <a:bodyPr/>
+                    <a:lstStyle/>
+                    <a:p>
+                      <a:r>
+                        <a:rPr sz="1200" b="1">
+                          <a:solidFill>
+                            <a:srgbClr val="FFFFFF"/>
+                          </a:solidFill>
+                          <a:latin typeface="Arial"/>
+                        </a:rPr>
+                        <a:t>Técnica</a:t>
+                      </a:r>
+                    </a:p>
+                  </a:txBody>
+                  <a:tcPr marL="45000" marR="45000" marT="25000" marB="25000" anchor="ctr">
+                    <a:solidFill>
+                      <a:srgbClr val="CD2D37"/>
+                    </a:solidFill>
+                  </a:tcPr>
+                </a:tc>
+                <a:tc>
+                  <a:txBody>
+                    <a:bodyPr/>
+                    <a:lstStyle/>
+                    <a:p>
+                      <a:r>
+                        <a:rPr sz="1200" b="1">
+                          <a:solidFill>
+                            <a:srgbClr val="FFFFFF"/>
+                          </a:solidFill>
+                          <a:latin typeface="Arial"/>
+                        </a:rPr>
+                        <a:t>Original</a:t>
+                      </a:r>
+                    </a:p>
+                  </a:txBody>
+                  <a:tcPr marL="45000" marR="45000" marT="25000" marB="25000" anchor="ctr">
+                    <a:solidFill>
+                      <a:srgbClr val="CD2D37"/>
+                    </a:solidFill>
+                  </a:tcPr>
+                </a:tc>
+                <a:tc>
+                  <a:txBody>
+                    <a:bodyPr/>
+                    <a:lstStyle/>
+                    <a:p>
+                      <a:r>
+                        <a:rPr sz="1200" b="1">
+                          <a:solidFill>
+                            <a:srgbClr val="FFFFFF"/>
+                          </a:solidFill>
+                          <a:latin typeface="Arial"/>
+                        </a:rPr>
+                        <a:t>Traducción</a:t>
+                      </a:r>
+                    </a:p>
+                  </a:txBody>
+                  <a:tcPr marL="45000" marR="45000" marT="25000" marB="25000" anchor="ctr">
+                    <a:solidFill>
+                      <a:srgbClr val="CD2D37"/>
+                    </a:solidFill>
+                  </a:tcPr>
+                </a:tc>
+                <a:tc>
+                  <a:txBody>
+                    <a:bodyPr/>
+                    <a:lstStyle/>
+                    <a:p>
+                      <a:r>
+                        <a:rPr sz="1200" b="1">
+                          <a:solidFill>
+                            <a:srgbClr val="FFFFFF"/>
+                          </a:solidFill>
+                          <a:latin typeface="Arial"/>
+                        </a:rPr>
+                        <a:t>Por qué</a:t>
+                      </a:r>
+                    </a:p>
+                  </a:txBody>
+                  <a:tcPr marL="45000" marR="45000" marT="25000" marB="25000" anchor="ctr">
+                    <a:solidFill>
+                      <a:srgbClr val="CD2D37"/>
+                    </a:solidFill>
+                  </a:tcPr>
+                </a:tc>
+              </a:tr>
+              <a:tr h="365760">
+                <a:tc>
+                  <a:txBody>
+                    <a:bodyPr/>
+                    <a:lstStyle/>
+                    <a:p>
+                      <a:r>
+                        <a:rPr sz="1100" b="0">
+                          <a:solidFill>
+                            <a:srgbClr val="465461"/>
+                          </a:solidFill>
+                          <a:latin typeface="Arial"/>
+                        </a:rPr>
+                        <a:t>TF-IDF</a:t>
+                      </a:r>
+                    </a:p>
+                  </a:txBody>
+                  <a:tcPr marL="45000" marR="45000" marT="25000" marB="25000" anchor="ctr">
+                    <a:solidFill>
+                      <a:srgbClr val="F1F2F6"/>
+                    </a:solidFill>
+                  </a:tcPr>
+                </a:tc>
+                <a:tc>
+                  <a:txBody>
+                    <a:bodyPr/>
+                    <a:lstStyle/>
+                    <a:p>
+                      <a:r>
+                        <a:rPr sz="1100" b="0">
+                          <a:solidFill>
+                            <a:srgbClr val="465461"/>
+                          </a:solidFill>
+                          <a:latin typeface="Arial"/>
+                        </a:rPr>
+                        <a:t>✓ si hay stopwords del idioma</a:t>
+                      </a:r>
+                    </a:p>
+                  </a:txBody>
+                  <a:tcPr marL="45000" marR="45000" marT="25000" marB="25000" anchor="ctr">
+                    <a:solidFill>
+                      <a:srgbClr val="F1F2F6"/>
+                    </a:solidFill>
+                  </a:tcPr>
+                </a:tc>
+                <a:tc>
+                  <a:txBody>
+                    <a:bodyPr/>
+                    <a:lstStyle/>
+                    <a:p>
+                      <a:r>
+                        <a:rPr sz="1100" b="0">
+                          <a:solidFill>
+                            <a:srgbClr val="465461"/>
+                          </a:solidFill>
+                          <a:latin typeface="Arial"/>
+                        </a:rPr>
+                        <a:t>✓ si no hay</a:t>
+                      </a:r>
+                    </a:p>
+                  </a:txBody>
+                  <a:tcPr marL="45000" marR="45000" marT="25000" marB="25000" anchor="ctr">
+                    <a:solidFill>
+                      <a:srgbClr val="F1F2F6"/>
+                    </a:solidFill>
+                  </a:tcPr>
+                </a:tc>
+                <a:tc>
+                  <a:txBody>
+                    <a:bodyPr/>
+                    <a:lstStyle/>
+                    <a:p>
+                      <a:r>
+                        <a:rPr sz="1100" b="0">
+                          <a:solidFill>
+                            <a:srgbClr val="465461"/>
+                          </a:solidFill>
+                          <a:latin typeface="Arial"/>
+                        </a:rPr>
+                        <a:t>Las stopwords en inglés no eliminan preposiciones rusas</a:t>
+                      </a:r>
+                    </a:p>
+                  </a:txBody>
+                  <a:tcPr marL="45000" marR="45000" marT="25000" marB="25000" anchor="ctr">
+                    <a:solidFill>
+                      <a:srgbClr val="F1F2F6"/>
+                    </a:solidFill>
+                  </a:tcPr>
+                </a:tc>
+              </a:tr>
+              <a:tr h="365760">
+                <a:tc>
+                  <a:txBody>
+                    <a:bodyPr/>
+                    <a:lstStyle/>
+                    <a:p>
+                      <a:r>
+                        <a:rPr sz="1100" b="0">
+                          <a:solidFill>
+                            <a:srgbClr val="465461"/>
+                          </a:solidFill>
+                          <a:latin typeface="Arial"/>
+                        </a:rPr>
+                        <a:t>LDA</a:t>
+                      </a:r>
+                    </a:p>
+                  </a:txBody>
+                  <a:tcPr marL="45000" marR="45000" marT="25000" marB="25000" anchor="ctr">
+                    <a:solidFill>
+                      <a:srgbClr val="FFFFFF"/>
+                    </a:solidFill>
+                  </a:tcPr>
+                </a:tc>
+                <a:tc>
+                  <a:txBody>
+                    <a:bodyPr/>
+                    <a:lstStyle/>
+                    <a:p>
+                      <a:r>
+                        <a:rPr sz="1100" b="0">
+                          <a:solidFill>
+                            <a:srgbClr val="465461"/>
+                          </a:solidFill>
+                          <a:latin typeface="Arial"/>
+                        </a:rPr>
+                        <a:t>✓ con tokenización correcta</a:t>
+                      </a:r>
+                    </a:p>
+                  </a:txBody>
+                  <a:tcPr marL="45000" marR="45000" marT="25000" marB="25000" anchor="ctr">
+                    <a:solidFill>
+                      <a:srgbClr val="FFFFFF"/>
+                    </a:solidFill>
+                  </a:tcPr>
+                </a:tc>
+                <a:tc>
+                  <a:txBody>
+                    <a:bodyPr/>
+                    <a:lstStyle/>
+                    <a:p>
+                      <a:r>
+                        <a:rPr sz="1100" b="0">
+                          <a:solidFill>
+                            <a:srgbClr val="465461"/>
+                          </a:solidFill>
+                          <a:latin typeface="Arial"/>
+                        </a:rPr>
+                        <a:t>Aceptable</a:t>
+                      </a:r>
+                    </a:p>
+                  </a:txBody>
+                  <a:tcPr marL="45000" marR="45000" marT="25000" marB="25000" anchor="ctr">
+                    <a:solidFill>
+                      <a:srgbClr val="FFFFFF"/>
+                    </a:solidFill>
+                  </a:tcPr>
+                </a:tc>
+                <a:tc>
+                  <a:txBody>
+                    <a:bodyPr/>
+                    <a:lstStyle/>
+                    <a:p>
+                      <a:r>
+                        <a:rPr sz="1100" b="0">
+                          <a:solidFill>
+                            <a:srgbClr val="465461"/>
+                          </a:solidFill>
+                          <a:latin typeface="Arial"/>
+                        </a:rPr>
+                        <a:t>Sin tokenizador multilingüe, los topics son ruido</a:t>
+                      </a:r>
+                    </a:p>
+                  </a:txBody>
+                  <a:tcPr marL="45000" marR="45000" marT="25000" marB="25000" anchor="ctr">
+                    <a:solidFill>
+                      <a:srgbClr val="FFFFFF"/>
+                    </a:solidFill>
+                  </a:tcPr>
+                </a:tc>
+              </a:tr>
+              <a:tr h="365760">
+                <a:tc>
+                  <a:txBody>
+                    <a:bodyPr/>
+                    <a:lstStyle/>
+                    <a:p>
+                      <a:r>
+                        <a:rPr sz="1100" b="0">
+                          <a:solidFill>
+                            <a:srgbClr val="465461"/>
+                          </a:solidFill>
+                          <a:latin typeface="Arial"/>
+                        </a:rPr>
+                        <a:t>Estadística</a:t>
+                      </a:r>
+                    </a:p>
+                  </a:txBody>
+                  <a:tcPr marL="45000" marR="45000" marT="25000" marB="25000" anchor="ctr">
+                    <a:solidFill>
+                      <a:srgbClr val="F1F2F6"/>
+                    </a:solidFill>
+                  </a:tcPr>
+                </a:tc>
+                <a:tc>
+                  <a:txBody>
+                    <a:bodyPr/>
+                    <a:lstStyle/>
+                    <a:p>
+                      <a:r>
+                        <a:rPr sz="1100" b="0">
+                          <a:solidFill>
+                            <a:srgbClr val="465461"/>
+                          </a:solidFill>
+                          <a:latin typeface="Arial"/>
+                        </a:rPr>
+                        <a:t>✓ siempre</a:t>
+                      </a:r>
+                    </a:p>
+                  </a:txBody>
+                  <a:tcPr marL="45000" marR="45000" marT="25000" marB="25000" anchor="ctr">
+                    <a:solidFill>
+                      <a:srgbClr val="F1F2F6"/>
+                    </a:solidFill>
+                  </a:tcPr>
+                </a:tc>
+                <a:tc>
+                  <a:txBody>
+                    <a:bodyPr/>
+                    <a:lstStyle/>
+                    <a:p>
+                      <a:r>
+                        <a:rPr sz="1100" b="0">
+                          <a:solidFill>
+                            <a:srgbClr val="465461"/>
+                          </a:solidFill>
+                          <a:latin typeface="Arial"/>
+                        </a:rPr>
+                        <a:t>No necesaria</a:t>
+                      </a:r>
+                    </a:p>
+                  </a:txBody>
+                  <a:tcPr marL="45000" marR="45000" marT="25000" marB="25000" anchor="ctr">
+                    <a:solidFill>
+                      <a:srgbClr val="F1F2F6"/>
+                    </a:solidFill>
+                  </a:tcPr>
+                </a:tc>
+                <a:tc>
+                  <a:txBody>
+                    <a:bodyPr/>
+                    <a:lstStyle/>
+                    <a:p>
+                      <a:r>
+                        <a:rPr sz="1100" b="0">
+                          <a:solidFill>
+                            <a:srgbClr val="465461"/>
+                          </a:solidFill>
+                          <a:latin typeface="Arial"/>
+                        </a:rPr>
+                        <a:t>Longitud, fechas, recuentos no dependen del idioma</a:t>
+                      </a:r>
+                    </a:p>
+                  </a:txBody>
+                  <a:tcPr marL="45000" marR="45000" marT="25000" marB="25000" anchor="ctr">
+                    <a:solidFill>
+                      <a:srgbClr val="F1F2F6"/>
+                    </a:solidFill>
+                  </a:tcPr>
+                </a:tc>
+              </a:tr>
+              <a:tr h="365760">
+                <a:tc>
+                  <a:txBody>
+                    <a:bodyPr/>
+                    <a:lstStyle/>
+                    <a:p>
+                      <a:r>
+                        <a:rPr sz="1100" b="0">
+                          <a:solidFill>
+                            <a:srgbClr val="465461"/>
+                          </a:solidFill>
+                          <a:latin typeface="Arial"/>
+                        </a:rPr>
+                        <a:t>Red social</a:t>
+                      </a:r>
+                    </a:p>
+                  </a:txBody>
+                  <a:tcPr marL="45000" marR="45000" marT="25000" marB="25000" anchor="ctr">
+                    <a:solidFill>
+                      <a:srgbClr val="FFFFFF"/>
+                    </a:solidFill>
+                  </a:tcPr>
+                </a:tc>
+                <a:tc>
+                  <a:txBody>
+                    <a:bodyPr/>
+                    <a:lstStyle/>
+                    <a:p>
+                      <a:r>
+                        <a:rPr sz="1100" b="0">
+                          <a:solidFill>
+                            <a:srgbClr val="465461"/>
+                          </a:solidFill>
+                          <a:latin typeface="Arial"/>
+                        </a:rPr>
+                        <a:t>✓ siempre</a:t>
+                      </a:r>
+                    </a:p>
+                  </a:txBody>
+                  <a:tcPr marL="45000" marR="45000" marT="25000" marB="25000" anchor="ctr">
+                    <a:solidFill>
+                      <a:srgbClr val="FFFFFF"/>
+                    </a:solidFill>
+                  </a:tcPr>
+                </a:tc>
+                <a:tc>
+                  <a:txBody>
+                    <a:bodyPr/>
+                    <a:lstStyle/>
+                    <a:p>
+                      <a:r>
+                        <a:rPr sz="1100" b="0">
+                          <a:solidFill>
+                            <a:srgbClr val="465461"/>
+                          </a:solidFill>
+                          <a:latin typeface="Arial"/>
+                        </a:rPr>
+                        <a:t>No necesaria</a:t>
+                      </a:r>
+                    </a:p>
+                  </a:txBody>
+                  <a:tcPr marL="45000" marR="45000" marT="25000" marB="25000" anchor="ctr">
+                    <a:solidFill>
+                      <a:srgbClr val="FFFFFF"/>
+                    </a:solidFill>
+                  </a:tcPr>
+                </a:tc>
+                <a:tc>
+                  <a:txBody>
+                    <a:bodyPr/>
+                    <a:lstStyle/>
+                    <a:p>
+                      <a:r>
+                        <a:rPr sz="1100" b="0">
+                          <a:solidFill>
+                            <a:srgbClr val="465461"/>
+                          </a:solidFill>
+                          <a:latin typeface="Arial"/>
+                        </a:rPr>
+                        <a:t>Las aristas del grafo son independientes del idioma</a:t>
+                      </a:r>
+                    </a:p>
+                  </a:txBody>
+                  <a:tcPr marL="45000" marR="45000" marT="25000" marB="25000" anchor="ctr">
+                    <a:solidFill>
+                      <a:srgbClr val="FFFFFF"/>
+                    </a:solidFill>
+                  </a:tcPr>
+                </a:tc>
+              </a:tr>
+            </a:tbl>
+          </a:graphicData>
+        </a:graphic>
+      </p:graphicFrame>
     </p:spTree>
   </p:cSld>
   <p:clrMapOvr>

--- a/bloque1_bigdata/csbc26_b1_bigdata.pptx
+++ b/bloque1_bigdata/csbc26_b1_bigdata.pptx
@@ -822,6 +822,11 @@
               <a:t>→ spikes: z-score, umbral µ+2σ</a:t>
             </a:r>
           </a:p>
+          <a:p>
+            <a:r>
+              <a:t>→ forward-ref: el mismo patrón semanal profesional reaparece en Ransomware como señal de operación profesionalizada</a:t>
+            </a:r>
+          </a:p>
         </p:txBody>
       </p:sp>
       <p:sp>
@@ -894,7 +899,7 @@
           </a:p>
           <a:p>
             <a:r>
-              <a:t>TF-IDF: términos discriminantes por foro/periodo</a:t>
+              <a:t>TF-IDF = Term Frequency–Inverse Document Frequency: términos discriminantes por foro/periodo</a:t>
             </a:r>
           </a:p>
           <a:p>
@@ -904,7 +909,7 @@
           </a:p>
           <a:p>
             <a:r>
-              <a:t>Funciona bien con texto ruidoso/slang</a:t>
+              <a:t>Funciona bien con texto ruidoso/jerga (ya vista en D3)</a:t>
             </a:r>
           </a:p>
           <a:p>
@@ -1064,12 +1069,12 @@
           <a:lstStyle/>
           <a:p>
             <a:r>
-              <a:t>Parte práctica — notebook CardingForums</a:t>
-            </a:r>
-          </a:p>
-          <a:p>
-            <a:r>
-              <a:t>Cargar dataset, auto-detección formato</a:t>
+              <a:t>Parte práctica — notebook demo_bigdata.ipynb (dataset CardingForums)</a:t>
+            </a:r>
+          </a:p>
+          <a:p>
+            <a:r>
+              <a:t>Cargar datos ya limpios (parquet), sin volver a parsear</a:t>
             </a:r>
           </a:p>
           <a:p>
@@ -1159,7 +1164,7 @@
           </a:p>
           <a:p>
             <a:r>
-              <a:t>Ojo: no es Hadoop ni petabytes</a:t>
+              <a:t>Ojo: no es cómputo distribuido a gran escala ni petabytes</a:t>
             </a:r>
           </a:p>
           <a:p>
@@ -1239,7 +1244,7 @@
           <a:lstStyle/>
           <a:p>
             <a:r>
-              <a:t>Expectativa clara: nada de cluster Hadoop</a:t>
+              <a:t>Expectativa clara: nada de cluster distribuido a gran escala</a:t>
             </a:r>
           </a:p>
           <a:p>
@@ -1249,7 +1254,7 @@
           </a:p>
           <a:p>
             <a:r>
-              <a:t>Power-law casi universal: 1% usuarios, 80% contenido</a:t>
+              <a:t>Explorar la forma primero: power-law es un ejemplo, no un dato aislado (1% usuarios, 80% contenido)</a:t>
             </a:r>
           </a:p>
           <a:p>
@@ -1514,7 +1519,12 @@
           </a:p>
           <a:p>
             <a:r>
-              <a:t>Louvain: comunidades sin fijar K</a:t>
+              <a:t>Louvain: maximiza modularidad, sin fijar K, fusiones locales iterativas hasta converger</a:t>
+            </a:r>
+          </a:p>
+          <a:p>
+            <a:r>
+              <a:t>→ speaker note: mostrar animación Louvain en vivo (fuente externa) si hay tiempo, no GIF embebido</a:t>
             </a:r>
           </a:p>
           <a:p>
@@ -1599,7 +1609,7 @@
           </a:p>
           <a:p>
             <a:r>
-              <a:t>Privada: rara en leaks, oro puro, confianza real</a:t>
+              <a:t>Privada: no universal, pero varios leaks del curso sí la incluyen — oro puro, confianza real</a:t>
             </a:r>
           </a:p>
           <a:p>
@@ -1674,7 +1684,7 @@
           <a:lstStyle/>
           <a:p>
             <a:r>
-              <a:t>Análisis más potente del bloque</a:t>
+              <a:t>Primer paso rápido, no la técnica más potente del bloque</a:t>
             </a:r>
           </a:p>
           <a:p>
@@ -1694,7 +1704,7 @@
           </a:p>
           <a:p>
             <a:r>
-              <a:t>→ base de investigación cross-foro</a:t>
+              <a:t>→ complementario a estilometría (Burrows' Delta) en HackingForums, no la reemplaza</a:t>
             </a:r>
           </a:p>
         </p:txBody>
@@ -5476,8 +5486,8 @@
         </p:nvSpPr>
         <p:spPr>
           <a:xfrm>
-            <a:off x="1073427" y="2077576"/>
-            <a:ext cx="10084904" cy="3507298"/>
+            <a:off x="1073427" y="2214736"/>
+            <a:ext cx="10084904" cy="3370138"/>
           </a:xfrm>
         </p:spPr>
         <p:txBody>
@@ -5566,8 +5576,8 @@
         </p:nvSpPr>
         <p:spPr>
           <a:xfrm>
-            <a:off x="1073427" y="2077576"/>
-            <a:ext cx="10084904" cy="3507298"/>
+            <a:off x="1073427" y="2214736"/>
+            <a:ext cx="10084904" cy="3370138"/>
           </a:xfrm>
         </p:spPr>
         <p:txBody>
@@ -5575,7 +5585,7 @@
           <a:lstStyle/>
           <a:p>
             <a:r>
-              <a:t>TF-IDF: términos más discriminantes por foro, por período, por subgrupo</a:t>
+              <a:t>TF-IDF (Term Frequency – Inverse Document Frequency): términos más discriminantes por foro, período o subgrupo</a:t>
             </a:r>
           </a:p>
           <a:p>
@@ -5590,7 +5600,7 @@
           </a:p>
           <a:p>
             <a:r>
-              <a:t>Funciona bien incluso con texto ruidoso, slang y abreviaciones</a:t>
+              <a:t>Funciona bien incluso con texto ruidoso, jerga (ya vista) y abreviaciones</a:t>
             </a:r>
           </a:p>
           <a:p>
@@ -5670,7 +5680,7 @@
           <p:nvPr/>
         </p:nvGraphicFramePr>
         <p:xfrm>
-          <a:off x="1051560" y="2651760"/>
+          <a:off x="1051560" y="2788920"/>
           <a:ext cx="10058400" cy="1828800"/>
         </p:xfrm>
         <a:graphic>
@@ -6174,7 +6184,7 @@
           <a:p>
             <a:pPr algn="ctr"/>
             <a:r>
-              <a:rPr sz="1300" b="1">
+              <a:rPr sz="1700" b="1">
                 <a:solidFill>
                   <a:srgbClr val="CD2D37"/>
                 </a:solidFill>
@@ -6198,7 +6208,7 @@
                 </a:solidFill>
                 <a:latin typeface="Arial"/>
               </a:rPr>
-              <a:t>CardingForums/01_carding_forums.ipynb</a:t>
+              <a:t>bloque1_bigdata/demo_bigdata.ipynb</a:t>
             </a:r>
           </a:p>
         </p:txBody>
@@ -6232,7 +6242,7 @@
                 </a:solidFill>
                 <a:latin typeface="Arial"/>
               </a:rPr>
-              <a:t>1.  Cargar dataset con load_forum() — auto-detección de formato</a:t>
+              <a:t>1.  Cargar datos ya limpios con pd.read_parquet() — sin volver a parsear</a:t>
             </a:r>
           </a:p>
           <a:p>
@@ -6316,7 +6326,7 @@
           <a:p>
             <a:pPr algn="ctr"/>
             <a:r>
-              <a:rPr sz="1300" b="1">
+              <a:rPr sz="1700" b="1">
                 <a:solidFill>
                   <a:srgbClr val="CD2D37"/>
                 </a:solidFill>
@@ -6396,8 +6406,8 @@
         </p:nvSpPr>
         <p:spPr>
           <a:xfrm>
-            <a:off x="1073427" y="2077576"/>
-            <a:ext cx="10084904" cy="3507298"/>
+            <a:off x="1073427" y="2214736"/>
+            <a:ext cx="10084904" cy="3370138"/>
           </a:xfrm>
         </p:spPr>
         <p:txBody>
@@ -6405,22 +6415,22 @@
           <a:lstStyle/>
           <a:p>
             <a:r>
-              <a:t>No estamos en Hadoop: millones de registros, no billones</a:t>
-            </a:r>
-          </a:p>
-          <a:p>
-            <a:r>
-              <a:t>El problema real: datos sucios, schemas inconsistentes, duplicados, texto multilingüe</a:t>
-            </a:r>
-          </a:p>
-          <a:p>
-            <a:r>
-              <a:t>Primero explorar, luego analizar — no al revés</a:t>
-            </a:r>
-          </a:p>
-          <a:p>
-            <a:r>
-              <a:t>La curva power-law es universal en foros: el 1% de usuarios genera el 80% del contenido</a:t>
+              <a:t>No es un cluster distribuido a gran escala: millones de registros, no billones</a:t>
+            </a:r>
+          </a:p>
+          <a:p>
+            <a:r>
+              <a:t>El problema real: datos sucios, schemas inconsistentes, duplicados, texto multilingüe (slang, leetspeak)</a:t>
+            </a:r>
+          </a:p>
+          <a:p>
+            <a:r>
+              <a:t>Primero explorar, luego analizar — entender la forma del dataset antes de medirlo</a:t>
+            </a:r>
+          </a:p>
+          <a:p>
+            <a:r>
+              <a:t>Ejemplo de esa forma: la curva power-law es universal en foros — el 1% de usuarios genera el 80% del contenido</a:t>
             </a:r>
           </a:p>
           <a:p>
@@ -6486,8 +6496,8 @@
         </p:nvSpPr>
         <p:spPr>
           <a:xfrm>
-            <a:off x="1073427" y="2580496"/>
-            <a:ext cx="10084904" cy="3004378"/>
+            <a:off x="1073427" y="2717656"/>
+            <a:ext cx="10084904" cy="2867218"/>
           </a:xfrm>
         </p:spPr>
         <p:txBody>
@@ -6560,7 +6570,7 @@
           <a:p>
             <a:pPr algn="ctr"/>
             <a:r>
-              <a:rPr sz="1300" b="1">
+              <a:rPr sz="1700" b="1">
                 <a:solidFill>
                   <a:srgbClr val="CD2D37"/>
                 </a:solidFill>
@@ -6584,7 +6594,7 @@
                 </a:solidFill>
                 <a:latin typeface="Arial"/>
               </a:rPr>
-              <a:t>Los foros son grafos — úsalos como tales</a:t>
+              <a:t>Grafos: la técnica estructural central de este bloque</a:t>
             </a:r>
           </a:p>
         </p:txBody>
@@ -6640,8 +6650,8 @@
         </p:nvSpPr>
         <p:spPr>
           <a:xfrm>
-            <a:off x="1073427" y="2077576"/>
-            <a:ext cx="10084904" cy="3507298"/>
+            <a:off x="1073427" y="2214736"/>
+            <a:ext cx="10084904" cy="3370138"/>
           </a:xfrm>
         </p:spPr>
         <p:txBody>
@@ -6664,7 +6674,7 @@
           </a:p>
           <a:p>
             <a:r>
-              <a:t>Algoritmos de detección de comunidades: Louvain sin necesidad de especificar K</a:t>
+              <a:t>Louvain: agrupa nodos maximizando modularidad, sin fijar K, por fusiones locales iterativas</a:t>
             </a:r>
           </a:p>
           <a:p>
@@ -6743,7 +6753,7 @@
         </p:nvSpPr>
         <p:spPr>
           <a:xfrm>
-            <a:off x="1051560" y="2194560"/>
+            <a:off x="1051560" y="2331720"/>
             <a:ext cx="4846320" cy="411480"/>
           </a:xfrm>
           <a:prstGeom prst="rect">
@@ -6778,8 +6788,8 @@
         </p:nvSpPr>
         <p:spPr>
           <a:xfrm>
-            <a:off x="1051560" y="2651760"/>
-            <a:ext cx="4846320" cy="3337560"/>
+            <a:off x="1051560" y="2788920"/>
+            <a:ext cx="4846320" cy="3200400"/>
           </a:xfrm>
           <a:prstGeom prst="rect">
             <a:avLst/>
@@ -6795,14 +6805,12 @@
             <a:r>
               <a:rPr sz="1600">
                 <a:solidFill>
-                  <a:srgbClr val="465461"/>
+                  <a:srgbClr val="CD2D37"/>
                 </a:solidFill>
                 <a:latin typeface="Arial"/>
               </a:rPr>
-              <a:t>▸  Aristas visibles a todos los miembros</a:t>
-            </a:r>
-          </a:p>
-          <a:p>
+              <a:t>▸  </a:t>
+            </a:r>
             <a:r>
               <a:rPr sz="1600">
                 <a:solidFill>
@@ -6810,10 +6818,19 @@
                 </a:solidFill>
                 <a:latin typeface="Arial"/>
               </a:rPr>
-              <a:t>▸  Refleja influencia pública y reputación</a:t>
-            </a:r>
-          </a:p>
-          <a:p>
+              <a:t>Conexiones visibles a todos los miembros del foro</a:t>
+            </a:r>
+          </a:p>
+          <a:p>
+            <a:r>
+              <a:rPr sz="1600">
+                <a:solidFill>
+                  <a:srgbClr val="CD2D37"/>
+                </a:solidFill>
+                <a:latin typeface="Arial"/>
+              </a:rPr>
+              <a:t>▸  </a:t>
+            </a:r>
             <a:r>
               <a:rPr sz="1600">
                 <a:solidFill>
@@ -6821,10 +6838,19 @@
                 </a:solidFill>
                 <a:latin typeface="Arial"/>
               </a:rPr>
-              <a:t>▸  Broker: el usuario más citado/respondido</a:t>
-            </a:r>
-          </a:p>
-          <a:p>
+              <a:t>Refleja influencia pública y reputación</a:t>
+            </a:r>
+          </a:p>
+          <a:p>
+            <a:r>
+              <a:rPr sz="1600">
+                <a:solidFill>
+                  <a:srgbClr val="CD2D37"/>
+                </a:solidFill>
+                <a:latin typeface="Arial"/>
+              </a:rPr>
+              <a:t>▸  </a:t>
+            </a:r>
             <a:r>
               <a:rPr sz="1600">
                 <a:solidFill>
@@ -6832,7 +6858,27 @@
                 </a:solidFill>
                 <a:latin typeface="Arial"/>
               </a:rPr>
-              <a:t>▸  Sesgada hacia los usuarios más activos</a:t>
+              <a:t>Broker: el usuario más citado/respondido</a:t>
+            </a:r>
+          </a:p>
+          <a:p>
+            <a:r>
+              <a:rPr sz="1600">
+                <a:solidFill>
+                  <a:srgbClr val="CD2D37"/>
+                </a:solidFill>
+                <a:latin typeface="Arial"/>
+              </a:rPr>
+              <a:t>▸  </a:t>
+            </a:r>
+            <a:r>
+              <a:rPr sz="1600">
+                <a:solidFill>
+                  <a:srgbClr val="465461"/>
+                </a:solidFill>
+                <a:latin typeface="Arial"/>
+              </a:rPr>
+              <a:t>Sesgada hacia los usuarios más activos</a:t>
             </a:r>
           </a:p>
         </p:txBody>
@@ -6845,7 +6891,7 @@
         </p:nvSpPr>
         <p:spPr>
           <a:xfrm>
-            <a:off x="6217920" y="2194560"/>
+            <a:off x="6217920" y="2331720"/>
             <a:ext cx="4846320" cy="411480"/>
           </a:xfrm>
           <a:prstGeom prst="rect">
@@ -6880,8 +6926,8 @@
         </p:nvSpPr>
         <p:spPr>
           <a:xfrm>
-            <a:off x="6217920" y="2651760"/>
-            <a:ext cx="4846320" cy="3337560"/>
+            <a:off x="6217920" y="2788920"/>
+            <a:ext cx="4846320" cy="3200400"/>
           </a:xfrm>
           <a:prstGeom prst="rect">
             <a:avLst/>
@@ -6897,14 +6943,12 @@
             <a:r>
               <a:rPr sz="1600">
                 <a:solidFill>
-                  <a:srgbClr val="465461"/>
+                  <a:srgbClr val="CD2D37"/>
                 </a:solidFill>
                 <a:latin typeface="Arial"/>
               </a:rPr>
-              <a:t>▸  Aristas ocultas — datos rarísimos en leaks</a:t>
-            </a:r>
-          </a:p>
-          <a:p>
+              <a:t>▸  </a:t>
+            </a:r>
             <a:r>
               <a:rPr sz="1600">
                 <a:solidFill>
@@ -6912,10 +6956,19 @@
                 </a:solidFill>
                 <a:latin typeface="Arial"/>
               </a:rPr>
-              <a:t>▸  Refleja confianza real entre actores</a:t>
-            </a:r>
-          </a:p>
-          <a:p>
+              <a:t>Conexiones no visibles — solo aparece si el leak los incluye</a:t>
+            </a:r>
+          </a:p>
+          <a:p>
+            <a:r>
+              <a:rPr sz="1600">
+                <a:solidFill>
+                  <a:srgbClr val="CD2D37"/>
+                </a:solidFill>
+                <a:latin typeface="Arial"/>
+              </a:rPr>
+              <a:t>▸  </a:t>
+            </a:r>
             <a:r>
               <a:rPr sz="1600">
                 <a:solidFill>
@@ -6923,10 +6976,19 @@
                 </a:solidFill>
                 <a:latin typeface="Arial"/>
               </a:rPr>
-              <a:t>▸  Broker privado ≠ broker público (casi siempre)</a:t>
-            </a:r>
-          </a:p>
-          <a:p>
+              <a:t>Refleja confianza real entre actores</a:t>
+            </a:r>
+          </a:p>
+          <a:p>
+            <a:r>
+              <a:rPr sz="1600">
+                <a:solidFill>
+                  <a:srgbClr val="CD2D37"/>
+                </a:solidFill>
+                <a:latin typeface="Arial"/>
+              </a:rPr>
+              <a:t>▸  </a:t>
+            </a:r>
             <a:r>
               <a:rPr sz="1600">
                 <a:solidFill>
@@ -6934,7 +6996,27 @@
                 </a:solidFill>
                 <a:latin typeface="Arial"/>
               </a:rPr>
-              <a:t>▸  Cuando está disponible, es el dato más valioso</a:t>
+              <a:t>Broker privado ≠ broker público (casi siempre)</a:t>
+            </a:r>
+          </a:p>
+          <a:p>
+            <a:r>
+              <a:rPr sz="1600">
+                <a:solidFill>
+                  <a:srgbClr val="CD2D37"/>
+                </a:solidFill>
+                <a:latin typeface="Arial"/>
+              </a:rPr>
+              <a:t>▸  </a:t>
+            </a:r>
+            <a:r>
+              <a:rPr sz="1600">
+                <a:solidFill>
+                  <a:srgbClr val="465461"/>
+                </a:solidFill>
+                <a:latin typeface="Arial"/>
+              </a:rPr>
+              <a:t>Cuando está disponible, es el dato más valioso</a:t>
             </a:r>
           </a:p>
         </p:txBody>
@@ -6973,7 +7055,7 @@
           <a:lstStyle/>
           <a:p>
             <a:r>
-              <a:t>Pivoting de identidades — el análisis más potente</a:t>
+              <a:t>Pivoting de identidades — primer paso, complementario a la estilometría</a:t>
             </a:r>
           </a:p>
         </p:txBody>
@@ -6990,8 +7072,8 @@
         </p:nvSpPr>
         <p:spPr>
           <a:xfrm>
-            <a:off x="1073427" y="2077576"/>
-            <a:ext cx="10084904" cy="3507298"/>
+            <a:off x="1073427" y="3220576"/>
+            <a:ext cx="10084904" cy="2364298"/>
           </a:xfrm>
         </p:spPr>
         <p:txBody>
@@ -7024,7 +7106,7 @@
           </a:p>
           <a:p>
             <a:r>
-              <a:t>Esto es pivoting manual — la base de cualquier investigación cross-foro</a:t>
+              <a:t>Pivoting manual, rápido y preparatorio — la confirmación fuerte llega con estilometría (Burrows' Delta, caso HackingForums)</a:t>
             </a:r>
           </a:p>
         </p:txBody>
@@ -7064,7 +7146,7 @@
           <a:p>
             <a:pPr algn="ctr"/>
             <a:r>
-              <a:rPr sz="1300" b="1">
+              <a:rPr sz="1700" b="1">
                 <a:solidFill>
                   <a:srgbClr val="CD2D37"/>
                 </a:solidFill>
